--- a/slides/modules/m02-build-deliver.pptx
+++ b/slides/modules/m02-build-deliver.pptx
@@ -13,6 +13,7 @@
     <p:sldId id="261" r:id="rId13"/>
     <p:sldId id="262" r:id="rId14"/>
     <p:sldId id="263" r:id="rId15"/>
+    <p:sldId id="264" r:id="rId16"/>
   </p:sldIdLst>
   <p:sldSz cx="12191695" cy="6858000" type="screen4x3"/>
   <p:notesSz cx="6858000" cy="9144000"/>
@@ -930,6 +931,76 @@
           <a:p>
             <a:r>
               <a:t>Land the transfer and stay honest. Prompts: how many Dockerfiles do your teams maintain versus need; can you trace a production image to its base; is there a curated paved road or does every team reinvent it. The credibility close — S2I is the default, but the Dockerfile strategy earns its keep when you must pin a base image; a lone BuildConfig is not a pipeline; and the ephemeral database you deployed is deliberately not production. Choosing the right on-ramp is the skill.</a:t>
+            </a:r>
+          </a:p>
+        </p:txBody>
+      </p:sp>
+      <p:sp>
+        <p:nvSpPr>
+          <p:cNvPr id="4" name="Slide Number Placeholder 3"/>
+          <p:cNvSpPr>
+            <a:spLocks noGrp="1"/>
+          </p:cNvSpPr>
+          <p:nvPr>
+            <p:ph type="sldNum" idx="5" sz="quarter"/>
+          </p:nvPr>
+        </p:nvSpPr>
+        <p:spPr/>
+      </p:sp>
+    </p:spTree>
+  </p:cSld>
+  <p:clrMapOvr>
+    <a:masterClrMapping/>
+  </p:clrMapOvr>
+</p:notes>
+</file>
+
+<file path=ppt/notesSlides/notesSlide8.xml><?xml version="1.0" encoding="utf-8"?>
+<p:notes xmlns:a="http://schemas.openxmlformats.org/drawingml/2006/main" xmlns:p="http://schemas.openxmlformats.org/presentationml/2006/main" xmlns:r="http://schemas.openxmlformats.org/officeDocument/2006/relationships">
+  <p:cSld>
+    <p:spTree>
+      <p:nvGrpSpPr>
+        <p:cNvPr id="1" name=""/>
+        <p:cNvGrpSpPr/>
+        <p:nvPr/>
+      </p:nvGrpSpPr>
+      <p:grpSpPr>
+        <a:xfrm>
+          <a:off x="0" y="0"/>
+          <a:ext cx="0" cy="0"/>
+          <a:chOff x="0" y="0"/>
+          <a:chExt cx="0" cy="0"/>
+        </a:xfrm>
+      </p:grpSpPr>
+      <p:sp>
+        <p:nvSpPr>
+          <p:cNvPr id="2" name="Slide Image Placeholder 1"/>
+          <p:cNvSpPr>
+            <a:spLocks noGrp="1"/>
+          </p:cNvSpPr>
+          <p:nvPr>
+            <p:ph type="sldImg" idx="2"/>
+          </p:nvPr>
+        </p:nvSpPr>
+        <p:spPr/>
+      </p:sp>
+      <p:sp>
+        <p:nvSpPr>
+          <p:cNvPr id="3" name="Notes Placeholder 2"/>
+          <p:cNvSpPr>
+            <a:spLocks noGrp="1"/>
+          </p:cNvSpPr>
+          <p:nvPr>
+            <p:ph type="body" idx="3" sz="quarter"/>
+          </p:nvPr>
+        </p:nvSpPr>
+        <p:spPr/>
+        <p:txBody>
+          <a:bodyPr/>
+          <a:lstStyle/>
+          <a:p>
+            <a:r>
+              <a:t>Concept diagram: What you built.</a:t>
             </a:r>
           </a:p>
         </p:txBody>
@@ -4307,11 +4378,11 @@
         <p:spPr>
           <a:xfrm>
             <a:off x="841248" y="2395728"/>
-            <a:ext cx="5715000" cy="530352"/>
+            <a:ext cx="5138928" cy="786384"/>
           </a:xfrm>
           <a:prstGeom prst="roundRect">
             <a:avLst>
-              <a:gd name="adj" fmla="val 6000"/>
+              <a:gd name="adj" fmla="val 7000"/>
             </a:avLst>
           </a:prstGeom>
           <a:solidFill>
@@ -4346,9 +4417,55 @@
           </a:p>
         </p:txBody>
       </p:sp>
+      <p:sp>
+        <p:nvSpPr>
+          <p:cNvPr id="7" name="Rounded Rectangle 6"/>
+          <p:cNvSpPr/>
+          <p:nvPr/>
+        </p:nvSpPr>
+        <p:spPr>
+          <a:xfrm>
+            <a:off x="987552" y="2532888"/>
+            <a:ext cx="512064" cy="512064"/>
+          </a:xfrm>
+          <a:prstGeom prst="roundRect">
+            <a:avLst>
+              <a:gd name="adj" fmla="val 26000"/>
+            </a:avLst>
+          </a:prstGeom>
+          <a:solidFill>
+            <a:srgbClr val="EE0000"/>
+          </a:solidFill>
+          <a:ln>
+            <a:noFill/>
+          </a:ln>
+          <a:effectLst/>
+        </p:spPr>
+        <p:style>
+          <a:lnRef idx="1">
+            <a:schemeClr val="accent1"/>
+          </a:lnRef>
+          <a:fillRef idx="3">
+            <a:schemeClr val="accent1"/>
+          </a:fillRef>
+          <a:effectRef idx="2">
+            <a:schemeClr val="accent1"/>
+          </a:effectRef>
+          <a:fontRef idx="minor">
+            <a:schemeClr val="lt1"/>
+          </a:fontRef>
+        </p:style>
+        <p:txBody>
+          <a:bodyPr rtlCol="0" anchor="ctr"/>
+          <a:lstStyle/>
+          <a:p>
+            <a:pPr algn="ctr"/>
+          </a:p>
+        </p:txBody>
+      </p:sp>
       <p:pic>
         <p:nvPicPr>
-          <p:cNvPr id="7" name="Picture 6" descr="check_steel.png"/>
+          <p:cNvPr id="8" name="Picture 7" descr="check_white.png"/>
           <p:cNvPicPr>
             <a:picLocks noChangeAspect="1"/>
           </p:cNvPicPr>
@@ -4362,8 +4479,8 @@
         </p:blipFill>
         <p:spPr>
           <a:xfrm>
-            <a:off x="987552" y="2542032"/>
-            <a:ext cx="237744" cy="237744"/>
+            <a:off x="1110447" y="2655783"/>
+            <a:ext cx="266273" cy="266273"/>
           </a:xfrm>
           <a:prstGeom prst="rect">
             <a:avLst/>
@@ -4372,14 +4489,14 @@
       </p:pic>
       <p:sp>
         <p:nvSpPr>
-          <p:cNvPr id="8" name="TextBox 7"/>
+          <p:cNvPr id="9" name="TextBox 8"/>
           <p:cNvSpPr txBox="1"/>
           <p:nvPr/>
         </p:nvSpPr>
         <p:spPr>
           <a:xfrm>
-            <a:off x="1353312" y="2395728"/>
-            <a:ext cx="5029200" cy="530352"/>
+            <a:off x="1627632" y="2395728"/>
+            <a:ext cx="4206240" cy="786384"/>
           </a:xfrm>
           <a:prstGeom prst="rect">
             <a:avLst/>
@@ -4404,7 +4521,7 @@
               </a:spcAft>
             </a:pPr>
             <a:r>
-              <a:rPr sz="1200" b="0">
+              <a:rPr sz="1150" b="0">
                 <a:solidFill>
                   <a:srgbClr val="1A1A1A"/>
                 </a:solidFill>
@@ -4417,18 +4534,18 @@
       </p:sp>
       <p:sp>
         <p:nvSpPr>
-          <p:cNvPr id="9" name="Rounded Rectangle 8"/>
+          <p:cNvPr id="10" name="Rounded Rectangle 9"/>
           <p:cNvSpPr/>
           <p:nvPr/>
         </p:nvSpPr>
         <p:spPr>
           <a:xfrm>
-            <a:off x="841248" y="2999232"/>
-            <a:ext cx="5715000" cy="530352"/>
+            <a:off x="6254496" y="2395728"/>
+            <a:ext cx="5138928" cy="786384"/>
           </a:xfrm>
           <a:prstGeom prst="roundRect">
             <a:avLst>
-              <a:gd name="adj" fmla="val 6000"/>
+              <a:gd name="adj" fmla="val 7000"/>
             </a:avLst>
           </a:prstGeom>
           <a:solidFill>
@@ -4463,9 +4580,55 @@
           </a:p>
         </p:txBody>
       </p:sp>
+      <p:sp>
+        <p:nvSpPr>
+          <p:cNvPr id="11" name="Rounded Rectangle 10"/>
+          <p:cNvSpPr/>
+          <p:nvPr/>
+        </p:nvSpPr>
+        <p:spPr>
+          <a:xfrm>
+            <a:off x="6400800" y="2532888"/>
+            <a:ext cx="512064" cy="512064"/>
+          </a:xfrm>
+          <a:prstGeom prst="roundRect">
+            <a:avLst>
+              <a:gd name="adj" fmla="val 26000"/>
+            </a:avLst>
+          </a:prstGeom>
+          <a:solidFill>
+            <a:srgbClr val="EE0000"/>
+          </a:solidFill>
+          <a:ln>
+            <a:noFill/>
+          </a:ln>
+          <a:effectLst/>
+        </p:spPr>
+        <p:style>
+          <a:lnRef idx="1">
+            <a:schemeClr val="accent1"/>
+          </a:lnRef>
+          <a:fillRef idx="3">
+            <a:schemeClr val="accent1"/>
+          </a:fillRef>
+          <a:effectRef idx="2">
+            <a:schemeClr val="accent1"/>
+          </a:effectRef>
+          <a:fontRef idx="minor">
+            <a:schemeClr val="lt1"/>
+          </a:fontRef>
+        </p:style>
+        <p:txBody>
+          <a:bodyPr rtlCol="0" anchor="ctr"/>
+          <a:lstStyle/>
+          <a:p>
+            <a:pPr algn="ctr"/>
+          </a:p>
+        </p:txBody>
+      </p:sp>
       <p:pic>
         <p:nvPicPr>
-          <p:cNvPr id="10" name="Picture 9" descr="check_steel.png"/>
+          <p:cNvPr id="12" name="Picture 11" descr="check_white.png"/>
           <p:cNvPicPr>
             <a:picLocks noChangeAspect="1"/>
           </p:cNvPicPr>
@@ -4479,8 +4642,8 @@
         </p:blipFill>
         <p:spPr>
           <a:xfrm>
-            <a:off x="987552" y="3145536"/>
-            <a:ext cx="237744" cy="237744"/>
+            <a:off x="6523695" y="2655783"/>
+            <a:ext cx="266273" cy="266273"/>
           </a:xfrm>
           <a:prstGeom prst="rect">
             <a:avLst/>
@@ -4489,14 +4652,14 @@
       </p:pic>
       <p:sp>
         <p:nvSpPr>
-          <p:cNvPr id="11" name="TextBox 10"/>
+          <p:cNvPr id="13" name="TextBox 12"/>
           <p:cNvSpPr txBox="1"/>
           <p:nvPr/>
         </p:nvSpPr>
         <p:spPr>
           <a:xfrm>
-            <a:off x="1353312" y="2999232"/>
-            <a:ext cx="5029200" cy="530352"/>
+            <a:off x="7040880" y="2395728"/>
+            <a:ext cx="4206240" cy="786384"/>
           </a:xfrm>
           <a:prstGeom prst="rect">
             <a:avLst/>
@@ -4521,7 +4684,7 @@
               </a:spcAft>
             </a:pPr>
             <a:r>
-              <a:rPr sz="1200" b="0">
+              <a:rPr sz="1150" b="0">
                 <a:solidFill>
                   <a:srgbClr val="1A1A1A"/>
                 </a:solidFill>
@@ -4534,18 +4697,18 @@
       </p:sp>
       <p:sp>
         <p:nvSpPr>
-          <p:cNvPr id="12" name="Rounded Rectangle 11"/>
+          <p:cNvPr id="14" name="Rounded Rectangle 13"/>
           <p:cNvSpPr/>
           <p:nvPr/>
         </p:nvSpPr>
         <p:spPr>
           <a:xfrm>
-            <a:off x="841248" y="3602736"/>
-            <a:ext cx="5715000" cy="530352"/>
+            <a:off x="841248" y="3328416"/>
+            <a:ext cx="5138928" cy="786384"/>
           </a:xfrm>
           <a:prstGeom prst="roundRect">
             <a:avLst>
-              <a:gd name="adj" fmla="val 6000"/>
+              <a:gd name="adj" fmla="val 7000"/>
             </a:avLst>
           </a:prstGeom>
           <a:solidFill>
@@ -4580,9 +4743,55 @@
           </a:p>
         </p:txBody>
       </p:sp>
+      <p:sp>
+        <p:nvSpPr>
+          <p:cNvPr id="15" name="Rounded Rectangle 14"/>
+          <p:cNvSpPr/>
+          <p:nvPr/>
+        </p:nvSpPr>
+        <p:spPr>
+          <a:xfrm>
+            <a:off x="987552" y="3465576"/>
+            <a:ext cx="512064" cy="512064"/>
+          </a:xfrm>
+          <a:prstGeom prst="roundRect">
+            <a:avLst>
+              <a:gd name="adj" fmla="val 26000"/>
+            </a:avLst>
+          </a:prstGeom>
+          <a:solidFill>
+            <a:srgbClr val="EE0000"/>
+          </a:solidFill>
+          <a:ln>
+            <a:noFill/>
+          </a:ln>
+          <a:effectLst/>
+        </p:spPr>
+        <p:style>
+          <a:lnRef idx="1">
+            <a:schemeClr val="accent1"/>
+          </a:lnRef>
+          <a:fillRef idx="3">
+            <a:schemeClr val="accent1"/>
+          </a:fillRef>
+          <a:effectRef idx="2">
+            <a:schemeClr val="accent1"/>
+          </a:effectRef>
+          <a:fontRef idx="minor">
+            <a:schemeClr val="lt1"/>
+          </a:fontRef>
+        </p:style>
+        <p:txBody>
+          <a:bodyPr rtlCol="0" anchor="ctr"/>
+          <a:lstStyle/>
+          <a:p>
+            <a:pPr algn="ctr"/>
+          </a:p>
+        </p:txBody>
+      </p:sp>
       <p:pic>
         <p:nvPicPr>
-          <p:cNvPr id="13" name="Picture 12" descr="check_steel.png"/>
+          <p:cNvPr id="16" name="Picture 15" descr="check_white.png"/>
           <p:cNvPicPr>
             <a:picLocks noChangeAspect="1"/>
           </p:cNvPicPr>
@@ -4596,8 +4805,8 @@
         </p:blipFill>
         <p:spPr>
           <a:xfrm>
-            <a:off x="987552" y="3749040"/>
-            <a:ext cx="237744" cy="237744"/>
+            <a:off x="1110447" y="3588471"/>
+            <a:ext cx="266273" cy="266273"/>
           </a:xfrm>
           <a:prstGeom prst="rect">
             <a:avLst/>
@@ -4606,14 +4815,14 @@
       </p:pic>
       <p:sp>
         <p:nvSpPr>
-          <p:cNvPr id="14" name="TextBox 13"/>
+          <p:cNvPr id="17" name="TextBox 16"/>
           <p:cNvSpPr txBox="1"/>
           <p:nvPr/>
         </p:nvSpPr>
         <p:spPr>
           <a:xfrm>
-            <a:off x="1353312" y="3602736"/>
-            <a:ext cx="5029200" cy="530352"/>
+            <a:off x="1627632" y="3328416"/>
+            <a:ext cx="4206240" cy="786384"/>
           </a:xfrm>
           <a:prstGeom prst="rect">
             <a:avLst/>
@@ -4638,7 +4847,7 @@
               </a:spcAft>
             </a:pPr>
             <a:r>
-              <a:rPr sz="1200" b="0">
+              <a:rPr sz="1150" b="0">
                 <a:solidFill>
                   <a:srgbClr val="1A1A1A"/>
                 </a:solidFill>
@@ -4651,18 +4860,18 @@
       </p:sp>
       <p:sp>
         <p:nvSpPr>
-          <p:cNvPr id="15" name="Rounded Rectangle 14"/>
+          <p:cNvPr id="18" name="Rounded Rectangle 17"/>
           <p:cNvSpPr/>
           <p:nvPr/>
         </p:nvSpPr>
         <p:spPr>
           <a:xfrm>
-            <a:off x="841248" y="4206240"/>
-            <a:ext cx="5715000" cy="530352"/>
+            <a:off x="6254496" y="3328416"/>
+            <a:ext cx="5138928" cy="786384"/>
           </a:xfrm>
           <a:prstGeom prst="roundRect">
             <a:avLst>
-              <a:gd name="adj" fmla="val 6000"/>
+              <a:gd name="adj" fmla="val 7000"/>
             </a:avLst>
           </a:prstGeom>
           <a:solidFill>
@@ -4697,9 +4906,55 @@
           </a:p>
         </p:txBody>
       </p:sp>
+      <p:sp>
+        <p:nvSpPr>
+          <p:cNvPr id="19" name="Rounded Rectangle 18"/>
+          <p:cNvSpPr/>
+          <p:nvPr/>
+        </p:nvSpPr>
+        <p:spPr>
+          <a:xfrm>
+            <a:off x="6400800" y="3465576"/>
+            <a:ext cx="512064" cy="512064"/>
+          </a:xfrm>
+          <a:prstGeom prst="roundRect">
+            <a:avLst>
+              <a:gd name="adj" fmla="val 26000"/>
+            </a:avLst>
+          </a:prstGeom>
+          <a:solidFill>
+            <a:srgbClr val="EE0000"/>
+          </a:solidFill>
+          <a:ln>
+            <a:noFill/>
+          </a:ln>
+          <a:effectLst/>
+        </p:spPr>
+        <p:style>
+          <a:lnRef idx="1">
+            <a:schemeClr val="accent1"/>
+          </a:lnRef>
+          <a:fillRef idx="3">
+            <a:schemeClr val="accent1"/>
+          </a:fillRef>
+          <a:effectRef idx="2">
+            <a:schemeClr val="accent1"/>
+          </a:effectRef>
+          <a:fontRef idx="minor">
+            <a:schemeClr val="lt1"/>
+          </a:fontRef>
+        </p:style>
+        <p:txBody>
+          <a:bodyPr rtlCol="0" anchor="ctr"/>
+          <a:lstStyle/>
+          <a:p>
+            <a:pPr algn="ctr"/>
+          </a:p>
+        </p:txBody>
+      </p:sp>
       <p:pic>
         <p:nvPicPr>
-          <p:cNvPr id="16" name="Picture 15" descr="check_steel.png"/>
+          <p:cNvPr id="20" name="Picture 19" descr="check_white.png"/>
           <p:cNvPicPr>
             <a:picLocks noChangeAspect="1"/>
           </p:cNvPicPr>
@@ -4713,8 +4968,8 @@
         </p:blipFill>
         <p:spPr>
           <a:xfrm>
-            <a:off x="987552" y="4352544"/>
-            <a:ext cx="237744" cy="237744"/>
+            <a:off x="6523695" y="3588471"/>
+            <a:ext cx="266273" cy="266273"/>
           </a:xfrm>
           <a:prstGeom prst="rect">
             <a:avLst/>
@@ -4723,14 +4978,14 @@
       </p:pic>
       <p:sp>
         <p:nvSpPr>
-          <p:cNvPr id="17" name="TextBox 16"/>
+          <p:cNvPr id="21" name="TextBox 20"/>
           <p:cNvSpPr txBox="1"/>
           <p:nvPr/>
         </p:nvSpPr>
         <p:spPr>
           <a:xfrm>
-            <a:off x="1353312" y="4206240"/>
-            <a:ext cx="5029200" cy="530352"/>
+            <a:off x="7040880" y="3328416"/>
+            <a:ext cx="4206240" cy="786384"/>
           </a:xfrm>
           <a:prstGeom prst="rect">
             <a:avLst/>
@@ -4755,7 +5010,7 @@
               </a:spcAft>
             </a:pPr>
             <a:r>
-              <a:rPr sz="1200" b="0">
+              <a:rPr sz="1150" b="0">
                 <a:solidFill>
                   <a:srgbClr val="1A1A1A"/>
                 </a:solidFill>
@@ -4768,18 +5023,18 @@
       </p:sp>
       <p:sp>
         <p:nvSpPr>
-          <p:cNvPr id="18" name="Rounded Rectangle 17"/>
+          <p:cNvPr id="22" name="Rounded Rectangle 21"/>
           <p:cNvSpPr/>
           <p:nvPr/>
         </p:nvSpPr>
         <p:spPr>
           <a:xfrm>
-            <a:off x="841248" y="4809744"/>
-            <a:ext cx="5715000" cy="530352"/>
+            <a:off x="841248" y="4261104"/>
+            <a:ext cx="5138928" cy="786384"/>
           </a:xfrm>
           <a:prstGeom prst="roundRect">
             <a:avLst>
-              <a:gd name="adj" fmla="val 6000"/>
+              <a:gd name="adj" fmla="val 7000"/>
             </a:avLst>
           </a:prstGeom>
           <a:solidFill>
@@ -4814,9 +5069,55 @@
           </a:p>
         </p:txBody>
       </p:sp>
+      <p:sp>
+        <p:nvSpPr>
+          <p:cNvPr id="23" name="Rounded Rectangle 22"/>
+          <p:cNvSpPr/>
+          <p:nvPr/>
+        </p:nvSpPr>
+        <p:spPr>
+          <a:xfrm>
+            <a:off x="987552" y="4398264"/>
+            <a:ext cx="512064" cy="512064"/>
+          </a:xfrm>
+          <a:prstGeom prst="roundRect">
+            <a:avLst>
+              <a:gd name="adj" fmla="val 26000"/>
+            </a:avLst>
+          </a:prstGeom>
+          <a:solidFill>
+            <a:srgbClr val="EE0000"/>
+          </a:solidFill>
+          <a:ln>
+            <a:noFill/>
+          </a:ln>
+          <a:effectLst/>
+        </p:spPr>
+        <p:style>
+          <a:lnRef idx="1">
+            <a:schemeClr val="accent1"/>
+          </a:lnRef>
+          <a:fillRef idx="3">
+            <a:schemeClr val="accent1"/>
+          </a:fillRef>
+          <a:effectRef idx="2">
+            <a:schemeClr val="accent1"/>
+          </a:effectRef>
+          <a:fontRef idx="minor">
+            <a:schemeClr val="lt1"/>
+          </a:fontRef>
+        </p:style>
+        <p:txBody>
+          <a:bodyPr rtlCol="0" anchor="ctr"/>
+          <a:lstStyle/>
+          <a:p>
+            <a:pPr algn="ctr"/>
+          </a:p>
+        </p:txBody>
+      </p:sp>
       <p:pic>
         <p:nvPicPr>
-          <p:cNvPr id="19" name="Picture 18" descr="check_steel.png"/>
+          <p:cNvPr id="24" name="Picture 23" descr="check_white.png"/>
           <p:cNvPicPr>
             <a:picLocks noChangeAspect="1"/>
           </p:cNvPicPr>
@@ -4830,8 +5131,8 @@
         </p:blipFill>
         <p:spPr>
           <a:xfrm>
-            <a:off x="987552" y="4956048"/>
-            <a:ext cx="237744" cy="237744"/>
+            <a:off x="1110447" y="4521159"/>
+            <a:ext cx="266273" cy="266273"/>
           </a:xfrm>
           <a:prstGeom prst="rect">
             <a:avLst/>
@@ -4840,14 +5141,14 @@
       </p:pic>
       <p:sp>
         <p:nvSpPr>
-          <p:cNvPr id="20" name="TextBox 19"/>
+          <p:cNvPr id="25" name="TextBox 24"/>
           <p:cNvSpPr txBox="1"/>
           <p:nvPr/>
         </p:nvSpPr>
         <p:spPr>
           <a:xfrm>
-            <a:off x="1353312" y="4809744"/>
-            <a:ext cx="5029200" cy="530352"/>
+            <a:off x="1627632" y="4261104"/>
+            <a:ext cx="4206240" cy="786384"/>
           </a:xfrm>
           <a:prstGeom prst="rect">
             <a:avLst/>
@@ -4872,221 +5173,13 @@
               </a:spcAft>
             </a:pPr>
             <a:r>
-              <a:rPr sz="1200" b="0">
+              <a:rPr sz="1150" b="0">
                 <a:solidFill>
                   <a:srgbClr val="1A1A1A"/>
                 </a:solidFill>
                 <a:latin typeface="Red Hat Text"/>
               </a:rPr>
               <a:t>Or let the platform do it</a:t>
-            </a:r>
-          </a:p>
-        </p:txBody>
-      </p:sp>
-      <p:sp>
-        <p:nvSpPr>
-          <p:cNvPr id="21" name="Rounded Rectangle 20"/>
-          <p:cNvSpPr/>
-          <p:nvPr/>
-        </p:nvSpPr>
-        <p:spPr>
-          <a:xfrm>
-            <a:off x="6812280" y="2395728"/>
-            <a:ext cx="4538167" cy="2944368"/>
-          </a:xfrm>
-          <a:prstGeom prst="roundRect">
-            <a:avLst>
-              <a:gd name="adj" fmla="val 4000"/>
-            </a:avLst>
-          </a:prstGeom>
-          <a:solidFill>
-            <a:srgbClr val="FFFFFF"/>
-          </a:solidFill>
-          <a:ln w="15240">
-            <a:solidFill>
-              <a:srgbClr val="DDE1E6"/>
-            </a:solidFill>
-          </a:ln>
-          <a:effectLst/>
-        </p:spPr>
-        <p:style>
-          <a:lnRef idx="1">
-            <a:schemeClr val="accent1"/>
-          </a:lnRef>
-          <a:fillRef idx="3">
-            <a:schemeClr val="accent1"/>
-          </a:fillRef>
-          <a:effectRef idx="2">
-            <a:schemeClr val="accent1"/>
-          </a:effectRef>
-          <a:fontRef idx="minor">
-            <a:schemeClr val="lt1"/>
-          </a:fontRef>
-        </p:style>
-        <p:txBody>
-          <a:bodyPr rtlCol="0" anchor="ctr"/>
-          <a:lstStyle/>
-          <a:p>
-            <a:pPr algn="ctr"/>
-          </a:p>
-        </p:txBody>
-      </p:sp>
-      <p:sp>
-        <p:nvSpPr>
-          <p:cNvPr id="22" name="Rounded Rectangle 21"/>
-          <p:cNvSpPr/>
-          <p:nvPr/>
-        </p:nvSpPr>
-        <p:spPr>
-          <a:xfrm>
-            <a:off x="7013448" y="2596896"/>
-            <a:ext cx="1298448" cy="310896"/>
-          </a:xfrm>
-          <a:prstGeom prst="roundRect">
-            <a:avLst>
-              <a:gd name="adj" fmla="val 50000"/>
-            </a:avLst>
-          </a:prstGeom>
-          <a:solidFill>
-            <a:srgbClr val="FCECEC"/>
-          </a:solidFill>
-          <a:ln>
-            <a:noFill/>
-          </a:ln>
-          <a:effectLst/>
-        </p:spPr>
-        <p:style>
-          <a:lnRef idx="1">
-            <a:schemeClr val="accent1"/>
-          </a:lnRef>
-          <a:fillRef idx="3">
-            <a:schemeClr val="accent1"/>
-          </a:fillRef>
-          <a:effectRef idx="2">
-            <a:schemeClr val="accent1"/>
-          </a:effectRef>
-          <a:fontRef idx="minor">
-            <a:schemeClr val="lt1"/>
-          </a:fontRef>
-        </p:style>
-        <p:txBody>
-          <a:bodyPr rtlCol="0" anchor="ctr"/>
-          <a:lstStyle/>
-          <a:p>
-            <a:pPr algn="ctr"/>
-          </a:p>
-        </p:txBody>
-      </p:sp>
-      <p:sp>
-        <p:nvSpPr>
-          <p:cNvPr id="23" name="TextBox 22"/>
-          <p:cNvSpPr txBox="1"/>
-          <p:nvPr/>
-        </p:nvSpPr>
-        <p:spPr>
-          <a:xfrm>
-            <a:off x="7013448" y="2596896"/>
-            <a:ext cx="1298448" cy="310896"/>
-          </a:xfrm>
-          <a:prstGeom prst="rect">
-            <a:avLst/>
-          </a:prstGeom>
-          <a:noFill/>
-        </p:spPr>
-        <p:txBody>
-          <a:bodyPr wrap="none" anchor="ctr" lIns="0" rIns="0" tIns="0" bIns="0">
-            <a:spAutoFit/>
-          </a:bodyPr>
-          <a:lstStyle/>
-          <a:p>
-            <a:pPr algn="ctr">
-              <a:lnSpc>
-                <a:spcPct val="106000"/>
-              </a:lnSpc>
-              <a:spcBef>
-                <a:spcPts val="0"/>
-              </a:spcBef>
-              <a:spcAft>
-                <a:spcPts val="0"/>
-              </a:spcAft>
-            </a:pPr>
-            <a:r>
-              <a:rPr sz="850" b="1">
-                <a:solidFill>
-                  <a:srgbClr val="B80000"/>
-                </a:solidFill>
-                <a:latin typeface="Red Hat Display"/>
-              </a:rPr>
-              <a:t>MEDIA PASS</a:t>
-            </a:r>
-          </a:p>
-        </p:txBody>
-      </p:sp>
-      <p:pic>
-        <p:nvPicPr>
-          <p:cNvPr id="24" name="Picture 23" descr="eye_slate.png"/>
-          <p:cNvPicPr>
-            <a:picLocks noChangeAspect="1"/>
-          </p:cNvPicPr>
-          <p:nvPr/>
-        </p:nvPicPr>
-        <p:blipFill>
-          <a:blip r:embed="rId4"/>
-          <a:stretch>
-            <a:fillRect/>
-          </a:stretch>
-        </p:blipFill>
-        <p:spPr>
-          <a:xfrm>
-            <a:off x="8843619" y="3108960"/>
-            <a:ext cx="475488" cy="475488"/>
-          </a:xfrm>
-          <a:prstGeom prst="rect">
-            <a:avLst/>
-          </a:prstGeom>
-        </p:spPr>
-      </p:pic>
-      <p:sp>
-        <p:nvSpPr>
-          <p:cNvPr id="25" name="TextBox 24"/>
-          <p:cNvSpPr txBox="1"/>
-          <p:nvPr/>
-        </p:nvSpPr>
-        <p:spPr>
-          <a:xfrm>
-            <a:off x="7050024" y="3721608"/>
-            <a:ext cx="4062679" cy="1481328"/>
-          </a:xfrm>
-          <a:prstGeom prst="rect">
-            <a:avLst/>
-          </a:prstGeom>
-          <a:noFill/>
-        </p:spPr>
-        <p:txBody>
-          <a:bodyPr wrap="square" anchor="t" lIns="0" rIns="0" tIns="0" bIns="0">
-            <a:spAutoFit/>
-          </a:bodyPr>
-          <a:lstStyle/>
-          <a:p>
-            <a:pPr algn="l">
-              <a:lnSpc>
-                <a:spcPct val="120000"/>
-              </a:lnSpc>
-              <a:spcBef>
-                <a:spcPts val="0"/>
-              </a:spcBef>
-              <a:spcAft>
-                <a:spcPts val="0"/>
-              </a:spcAft>
-            </a:pPr>
-            <a:r>
-              <a:rPr sz="950" b="0">
-                <a:solidFill>
-                  <a:srgbClr val="8A9099"/>
-                </a:solidFill>
-                <a:latin typeface="Red Hat Text"/>
-              </a:rPr>
-              <a:t>A Git repo icon with an arrow to a question mark over an OpenShift cluster — "source in, running app out?"</a:t>
             </a:r>
           </a:p>
         </p:txBody>
@@ -5394,7 +5487,7 @@
         <p:spPr>
           <a:xfrm>
             <a:off x="841248" y="2395728"/>
-            <a:ext cx="5715000" cy="530352"/>
+            <a:ext cx="4160520" cy="475488"/>
           </a:xfrm>
           <a:prstGeom prst="roundRect">
             <a:avLst>
@@ -5449,8 +5542,8 @@
         </p:blipFill>
         <p:spPr>
           <a:xfrm>
-            <a:off x="987552" y="2542032"/>
-            <a:ext cx="237744" cy="237744"/>
+            <a:off x="969264" y="2532888"/>
+            <a:ext cx="201168" cy="201168"/>
           </a:xfrm>
           <a:prstGeom prst="rect">
             <a:avLst/>
@@ -5465,8 +5558,8 @@
         </p:nvSpPr>
         <p:spPr>
           <a:xfrm>
-            <a:off x="1353312" y="2395728"/>
-            <a:ext cx="5029200" cy="530352"/>
+            <a:off x="1280160" y="2395728"/>
+            <a:ext cx="3593591" cy="475488"/>
           </a:xfrm>
           <a:prstGeom prst="rect">
             <a:avLst/>
@@ -5491,7 +5584,7 @@
               </a:spcAft>
             </a:pPr>
             <a:r>
-              <a:rPr sz="1200" b="0">
+              <a:rPr sz="1050" b="0">
                 <a:solidFill>
                   <a:srgbClr val="1A1A1A"/>
                 </a:solidFill>
@@ -5510,8 +5603,8 @@
         </p:nvSpPr>
         <p:spPr>
           <a:xfrm>
-            <a:off x="841248" y="2999232"/>
-            <a:ext cx="5715000" cy="530352"/>
+            <a:off x="841248" y="2944368"/>
+            <a:ext cx="4160520" cy="475488"/>
           </a:xfrm>
           <a:prstGeom prst="roundRect">
             <a:avLst>
@@ -5566,8 +5659,8 @@
         </p:blipFill>
         <p:spPr>
           <a:xfrm>
-            <a:off x="987552" y="3145536"/>
-            <a:ext cx="237744" cy="237744"/>
+            <a:off x="969264" y="3081528"/>
+            <a:ext cx="201168" cy="201168"/>
           </a:xfrm>
           <a:prstGeom prst="rect">
             <a:avLst/>
@@ -5582,8 +5675,8 @@
         </p:nvSpPr>
         <p:spPr>
           <a:xfrm>
-            <a:off x="1353312" y="2999232"/>
-            <a:ext cx="5029200" cy="530352"/>
+            <a:off x="1280160" y="2944368"/>
+            <a:ext cx="3593591" cy="475488"/>
           </a:xfrm>
           <a:prstGeom prst="rect">
             <a:avLst/>
@@ -5608,7 +5701,7 @@
               </a:spcAft>
             </a:pPr>
             <a:r>
-              <a:rPr sz="1200" b="0">
+              <a:rPr sz="1050" b="0">
                 <a:solidFill>
                   <a:srgbClr val="1A1A1A"/>
                 </a:solidFill>
@@ -5627,8 +5720,8 @@
         </p:nvSpPr>
         <p:spPr>
           <a:xfrm>
-            <a:off x="841248" y="3602736"/>
-            <a:ext cx="5715000" cy="530352"/>
+            <a:off x="841248" y="3493008"/>
+            <a:ext cx="4160520" cy="475488"/>
           </a:xfrm>
           <a:prstGeom prst="roundRect">
             <a:avLst>
@@ -5683,8 +5776,8 @@
         </p:blipFill>
         <p:spPr>
           <a:xfrm>
-            <a:off x="987552" y="3749040"/>
-            <a:ext cx="237744" cy="237744"/>
+            <a:off x="969264" y="3630168"/>
+            <a:ext cx="201168" cy="201168"/>
           </a:xfrm>
           <a:prstGeom prst="rect">
             <a:avLst/>
@@ -5699,8 +5792,8 @@
         </p:nvSpPr>
         <p:spPr>
           <a:xfrm>
-            <a:off x="1353312" y="3602736"/>
-            <a:ext cx="5029200" cy="530352"/>
+            <a:off x="1280160" y="3493008"/>
+            <a:ext cx="3593591" cy="475488"/>
           </a:xfrm>
           <a:prstGeom prst="rect">
             <a:avLst/>
@@ -5725,7 +5818,7 @@
               </a:spcAft>
             </a:pPr>
             <a:r>
-              <a:rPr sz="1200" b="0">
+              <a:rPr sz="1050" b="0">
                 <a:solidFill>
                   <a:srgbClr val="1A1A1A"/>
                 </a:solidFill>
@@ -5744,8 +5837,8 @@
         </p:nvSpPr>
         <p:spPr>
           <a:xfrm>
-            <a:off x="841248" y="4206240"/>
-            <a:ext cx="5715000" cy="530352"/>
+            <a:off x="841248" y="4041648"/>
+            <a:ext cx="4160520" cy="475488"/>
           </a:xfrm>
           <a:prstGeom prst="roundRect">
             <a:avLst>
@@ -5800,8 +5893,8 @@
         </p:blipFill>
         <p:spPr>
           <a:xfrm>
-            <a:off x="987552" y="4352544"/>
-            <a:ext cx="237744" cy="237744"/>
+            <a:off x="969264" y="4178807"/>
+            <a:ext cx="201168" cy="201168"/>
           </a:xfrm>
           <a:prstGeom prst="rect">
             <a:avLst/>
@@ -5816,8 +5909,8 @@
         </p:nvSpPr>
         <p:spPr>
           <a:xfrm>
-            <a:off x="1353312" y="4206240"/>
-            <a:ext cx="5029200" cy="530352"/>
+            <a:off x="1280160" y="4041648"/>
+            <a:ext cx="3593591" cy="475488"/>
           </a:xfrm>
           <a:prstGeom prst="rect">
             <a:avLst/>
@@ -5842,7 +5935,7 @@
               </a:spcAft>
             </a:pPr>
             <a:r>
-              <a:rPr sz="1200" b="0">
+              <a:rPr sz="1050" b="0">
                 <a:solidFill>
                   <a:srgbClr val="1A1A1A"/>
                 </a:solidFill>
@@ -5861,8 +5954,8 @@
         </p:nvSpPr>
         <p:spPr>
           <a:xfrm>
-            <a:off x="841248" y="4809744"/>
-            <a:ext cx="5715000" cy="530352"/>
+            <a:off x="841248" y="4590288"/>
+            <a:ext cx="4160520" cy="475488"/>
           </a:xfrm>
           <a:prstGeom prst="roundRect">
             <a:avLst>
@@ -5917,8 +6010,8 @@
         </p:blipFill>
         <p:spPr>
           <a:xfrm>
-            <a:off x="987552" y="4956048"/>
-            <a:ext cx="237744" cy="237744"/>
+            <a:off x="969264" y="4727447"/>
+            <a:ext cx="201168" cy="201168"/>
           </a:xfrm>
           <a:prstGeom prst="rect">
             <a:avLst/>
@@ -5933,8 +6026,8 @@
         </p:nvSpPr>
         <p:spPr>
           <a:xfrm>
-            <a:off x="1353312" y="4809744"/>
-            <a:ext cx="5029200" cy="530352"/>
+            <a:off x="1280160" y="4590288"/>
+            <a:ext cx="3593591" cy="475488"/>
           </a:xfrm>
           <a:prstGeom prst="rect">
             <a:avLst/>
@@ -5959,7 +6052,7 @@
               </a:spcAft>
             </a:pPr>
             <a:r>
-              <a:rPr sz="1200" b="0">
+              <a:rPr sz="1050" b="0">
                 <a:solidFill>
                   <a:srgbClr val="1A1A1A"/>
                 </a:solidFill>
@@ -5978,8 +6071,8 @@
         </p:nvSpPr>
         <p:spPr>
           <a:xfrm>
-            <a:off x="6812280" y="2395728"/>
-            <a:ext cx="4538167" cy="2944368"/>
+            <a:off x="5385816" y="2395728"/>
+            <a:ext cx="1853636" cy="3657600"/>
           </a:xfrm>
           <a:prstGeom prst="roundRect">
             <a:avLst>
@@ -6018,100 +6111,9 @@
           </a:p>
         </p:txBody>
       </p:sp>
-      <p:sp>
-        <p:nvSpPr>
-          <p:cNvPr id="22" name="Rounded Rectangle 21"/>
-          <p:cNvSpPr/>
-          <p:nvPr/>
-        </p:nvSpPr>
-        <p:spPr>
-          <a:xfrm>
-            <a:off x="7013448" y="2596896"/>
-            <a:ext cx="1298448" cy="310896"/>
-          </a:xfrm>
-          <a:prstGeom prst="roundRect">
-            <a:avLst>
-              <a:gd name="adj" fmla="val 50000"/>
-            </a:avLst>
-          </a:prstGeom>
-          <a:solidFill>
-            <a:srgbClr val="FCECEC"/>
-          </a:solidFill>
-          <a:ln>
-            <a:noFill/>
-          </a:ln>
-          <a:effectLst/>
-        </p:spPr>
-        <p:style>
-          <a:lnRef idx="1">
-            <a:schemeClr val="accent1"/>
-          </a:lnRef>
-          <a:fillRef idx="3">
-            <a:schemeClr val="accent1"/>
-          </a:fillRef>
-          <a:effectRef idx="2">
-            <a:schemeClr val="accent1"/>
-          </a:effectRef>
-          <a:fontRef idx="minor">
-            <a:schemeClr val="lt1"/>
-          </a:fontRef>
-        </p:style>
-        <p:txBody>
-          <a:bodyPr rtlCol="0" anchor="ctr"/>
-          <a:lstStyle/>
-          <a:p>
-            <a:pPr algn="ctr"/>
-          </a:p>
-        </p:txBody>
-      </p:sp>
-      <p:sp>
-        <p:nvSpPr>
-          <p:cNvPr id="23" name="TextBox 22"/>
-          <p:cNvSpPr txBox="1"/>
-          <p:nvPr/>
-        </p:nvSpPr>
-        <p:spPr>
-          <a:xfrm>
-            <a:off x="7013448" y="2596896"/>
-            <a:ext cx="1298448" cy="310896"/>
-          </a:xfrm>
-          <a:prstGeom prst="rect">
-            <a:avLst/>
-          </a:prstGeom>
-          <a:noFill/>
-        </p:spPr>
-        <p:txBody>
-          <a:bodyPr wrap="none" anchor="ctr" lIns="0" rIns="0" tIns="0" bIns="0">
-            <a:spAutoFit/>
-          </a:bodyPr>
-          <a:lstStyle/>
-          <a:p>
-            <a:pPr algn="ctr">
-              <a:lnSpc>
-                <a:spcPct val="106000"/>
-              </a:lnSpc>
-              <a:spcBef>
-                <a:spcPts val="0"/>
-              </a:spcBef>
-              <a:spcAft>
-                <a:spcPts val="0"/>
-              </a:spcAft>
-            </a:pPr>
-            <a:r>
-              <a:rPr sz="850" b="1">
-                <a:solidFill>
-                  <a:srgbClr val="B80000"/>
-                </a:solidFill>
-                <a:latin typeface="Red Hat Display"/>
-              </a:rPr>
-              <a:t>MEDIA PASS</a:t>
-            </a:r>
-          </a:p>
-        </p:txBody>
-      </p:sp>
       <p:pic>
         <p:nvPicPr>
-          <p:cNvPr id="24" name="Picture 23" descr="eye_slate.png"/>
+          <p:cNvPr id="22" name="Picture 21" descr="01-build-spectrum.png"/>
           <p:cNvPicPr>
             <a:picLocks noChangeAspect="1"/>
           </p:cNvPicPr>
@@ -6125,62 +6127,17 @@
         </p:blipFill>
         <p:spPr>
           <a:xfrm>
-            <a:off x="8843619" y="3108960"/>
-            <a:ext cx="475488" cy="475488"/>
+            <a:off x="5532120" y="2542032"/>
+            <a:ext cx="1561028" cy="3364992"/>
           </a:xfrm>
           <a:prstGeom prst="rect">
             <a:avLst/>
           </a:prstGeom>
         </p:spPr>
       </p:pic>
-      <p:sp>
-        <p:nvSpPr>
-          <p:cNvPr id="25" name="TextBox 24"/>
-          <p:cNvSpPr txBox="1"/>
-          <p:nvPr/>
-        </p:nvSpPr>
-        <p:spPr>
-          <a:xfrm>
-            <a:off x="7050024" y="3721608"/>
-            <a:ext cx="4062679" cy="1481328"/>
-          </a:xfrm>
-          <a:prstGeom prst="rect">
-            <a:avLst/>
-          </a:prstGeom>
-          <a:noFill/>
-        </p:spPr>
-        <p:txBody>
-          <a:bodyPr wrap="square" anchor="t" lIns="0" rIns="0" tIns="0" bIns="0">
-            <a:spAutoFit/>
-          </a:bodyPr>
-          <a:lstStyle/>
-          <a:p>
-            <a:pPr algn="l">
-              <a:lnSpc>
-                <a:spcPct val="120000"/>
-              </a:lnSpc>
-              <a:spcBef>
-                <a:spcPts val="0"/>
-              </a:spcBef>
-              <a:spcAft>
-                <a:spcPts val="0"/>
-              </a:spcAft>
-            </a:pPr>
-            <a:r>
-              <a:rPr sz="950" b="0">
-                <a:solidFill>
-                  <a:srgbClr val="8A9099"/>
-                </a:solidFill>
-                <a:latin typeface="Red Hat Text"/>
-              </a:rPr>
-              <a:t>Reuse concept diagram build-deliver-01-build-spectrum.svg — the decision tree from image? / source? / need control? / workflow?</a:t>
-            </a:r>
-          </a:p>
-        </p:txBody>
-      </p:sp>
       <p:cxnSp>
         <p:nvCxnSpPr>
-          <p:cNvPr id="26" name="Connector 25"/>
+          <p:cNvPr id="23" name="Connector 22"/>
           <p:cNvCxnSpPr/>
           <p:nvPr/>
         </p:nvCxnSpPr>
@@ -6216,7 +6173,7 @@
       </p:cxnSp>
       <p:sp>
         <p:nvSpPr>
-          <p:cNvPr id="27" name="TextBox 26"/>
+          <p:cNvPr id="24" name="TextBox 23"/>
           <p:cNvSpPr txBox="1"/>
           <p:nvPr/>
         </p:nvSpPr>
@@ -6261,7 +6218,7 @@
       </p:sp>
       <p:sp>
         <p:nvSpPr>
-          <p:cNvPr id="28" name="TextBox 27"/>
+          <p:cNvPr id="25" name="TextBox 24"/>
           <p:cNvSpPr txBox="1"/>
           <p:nvPr/>
         </p:nvSpPr>
@@ -6481,11 +6438,11 @@
         <p:spPr>
           <a:xfrm>
             <a:off x="841248" y="2395728"/>
-            <a:ext cx="5715000" cy="530352"/>
+            <a:ext cx="5138928" cy="786384"/>
           </a:xfrm>
           <a:prstGeom prst="roundRect">
             <a:avLst>
-              <a:gd name="adj" fmla="val 6000"/>
+              <a:gd name="adj" fmla="val 7000"/>
             </a:avLst>
           </a:prstGeom>
           <a:solidFill>
@@ -6520,9 +6477,55 @@
           </a:p>
         </p:txBody>
       </p:sp>
+      <p:sp>
+        <p:nvSpPr>
+          <p:cNvPr id="7" name="Rounded Rectangle 6"/>
+          <p:cNvSpPr/>
+          <p:nvPr/>
+        </p:nvSpPr>
+        <p:spPr>
+          <a:xfrm>
+            <a:off x="987552" y="2532888"/>
+            <a:ext cx="512064" cy="512064"/>
+          </a:xfrm>
+          <a:prstGeom prst="roundRect">
+            <a:avLst>
+              <a:gd name="adj" fmla="val 26000"/>
+            </a:avLst>
+          </a:prstGeom>
+          <a:solidFill>
+            <a:srgbClr val="EE0000"/>
+          </a:solidFill>
+          <a:ln>
+            <a:noFill/>
+          </a:ln>
+          <a:effectLst/>
+        </p:spPr>
+        <p:style>
+          <a:lnRef idx="1">
+            <a:schemeClr val="accent1"/>
+          </a:lnRef>
+          <a:fillRef idx="3">
+            <a:schemeClr val="accent1"/>
+          </a:fillRef>
+          <a:effectRef idx="2">
+            <a:schemeClr val="accent1"/>
+          </a:effectRef>
+          <a:fontRef idx="minor">
+            <a:schemeClr val="lt1"/>
+          </a:fontRef>
+        </p:style>
+        <p:txBody>
+          <a:bodyPr rtlCol="0" anchor="ctr"/>
+          <a:lstStyle/>
+          <a:p>
+            <a:pPr algn="ctr"/>
+          </a:p>
+        </p:txBody>
+      </p:sp>
       <p:pic>
         <p:nvPicPr>
-          <p:cNvPr id="7" name="Picture 6" descr="check_steel.png"/>
+          <p:cNvPr id="8" name="Picture 7" descr="check_white.png"/>
           <p:cNvPicPr>
             <a:picLocks noChangeAspect="1"/>
           </p:cNvPicPr>
@@ -6536,8 +6539,8 @@
         </p:blipFill>
         <p:spPr>
           <a:xfrm>
-            <a:off x="987552" y="2542032"/>
-            <a:ext cx="237744" cy="237744"/>
+            <a:off x="1110447" y="2655783"/>
+            <a:ext cx="266273" cy="266273"/>
           </a:xfrm>
           <a:prstGeom prst="rect">
             <a:avLst/>
@@ -6546,14 +6549,14 @@
       </p:pic>
       <p:sp>
         <p:nvSpPr>
-          <p:cNvPr id="8" name="TextBox 7"/>
+          <p:cNvPr id="9" name="TextBox 8"/>
           <p:cNvSpPr txBox="1"/>
           <p:nvPr/>
         </p:nvSpPr>
         <p:spPr>
           <a:xfrm>
-            <a:off x="1353312" y="2395728"/>
-            <a:ext cx="5029200" cy="530352"/>
+            <a:off x="1627632" y="2395728"/>
+            <a:ext cx="4206240" cy="786384"/>
           </a:xfrm>
           <a:prstGeom prst="rect">
             <a:avLst/>
@@ -6578,7 +6581,7 @@
               </a:spcAft>
             </a:pPr>
             <a:r>
-              <a:rPr sz="1200" b="0">
+              <a:rPr sz="1150" b="0">
                 <a:solidFill>
                   <a:srgbClr val="1A1A1A"/>
                 </a:solidFill>
@@ -6591,18 +6594,18 @@
       </p:sp>
       <p:sp>
         <p:nvSpPr>
-          <p:cNvPr id="9" name="Rounded Rectangle 8"/>
+          <p:cNvPr id="10" name="Rounded Rectangle 9"/>
           <p:cNvSpPr/>
           <p:nvPr/>
         </p:nvSpPr>
         <p:spPr>
           <a:xfrm>
-            <a:off x="841248" y="2999232"/>
-            <a:ext cx="5715000" cy="530352"/>
+            <a:off x="6254496" y="2395728"/>
+            <a:ext cx="5138928" cy="786384"/>
           </a:xfrm>
           <a:prstGeom prst="roundRect">
             <a:avLst>
-              <a:gd name="adj" fmla="val 6000"/>
+              <a:gd name="adj" fmla="val 7000"/>
             </a:avLst>
           </a:prstGeom>
           <a:solidFill>
@@ -6637,9 +6640,55 @@
           </a:p>
         </p:txBody>
       </p:sp>
+      <p:sp>
+        <p:nvSpPr>
+          <p:cNvPr id="11" name="Rounded Rectangle 10"/>
+          <p:cNvSpPr/>
+          <p:nvPr/>
+        </p:nvSpPr>
+        <p:spPr>
+          <a:xfrm>
+            <a:off x="6400800" y="2532888"/>
+            <a:ext cx="512064" cy="512064"/>
+          </a:xfrm>
+          <a:prstGeom prst="roundRect">
+            <a:avLst>
+              <a:gd name="adj" fmla="val 26000"/>
+            </a:avLst>
+          </a:prstGeom>
+          <a:solidFill>
+            <a:srgbClr val="EE0000"/>
+          </a:solidFill>
+          <a:ln>
+            <a:noFill/>
+          </a:ln>
+          <a:effectLst/>
+        </p:spPr>
+        <p:style>
+          <a:lnRef idx="1">
+            <a:schemeClr val="accent1"/>
+          </a:lnRef>
+          <a:fillRef idx="3">
+            <a:schemeClr val="accent1"/>
+          </a:fillRef>
+          <a:effectRef idx="2">
+            <a:schemeClr val="accent1"/>
+          </a:effectRef>
+          <a:fontRef idx="minor">
+            <a:schemeClr val="lt1"/>
+          </a:fontRef>
+        </p:style>
+        <p:txBody>
+          <a:bodyPr rtlCol="0" anchor="ctr"/>
+          <a:lstStyle/>
+          <a:p>
+            <a:pPr algn="ctr"/>
+          </a:p>
+        </p:txBody>
+      </p:sp>
       <p:pic>
         <p:nvPicPr>
-          <p:cNvPr id="10" name="Picture 9" descr="check_steel.png"/>
+          <p:cNvPr id="12" name="Picture 11" descr="check_white.png"/>
           <p:cNvPicPr>
             <a:picLocks noChangeAspect="1"/>
           </p:cNvPicPr>
@@ -6653,8 +6702,8 @@
         </p:blipFill>
         <p:spPr>
           <a:xfrm>
-            <a:off x="987552" y="3145536"/>
-            <a:ext cx="237744" cy="237744"/>
+            <a:off x="6523695" y="2655783"/>
+            <a:ext cx="266273" cy="266273"/>
           </a:xfrm>
           <a:prstGeom prst="rect">
             <a:avLst/>
@@ -6663,14 +6712,14 @@
       </p:pic>
       <p:sp>
         <p:nvSpPr>
-          <p:cNvPr id="11" name="TextBox 10"/>
+          <p:cNvPr id="13" name="TextBox 12"/>
           <p:cNvSpPr txBox="1"/>
           <p:nvPr/>
         </p:nvSpPr>
         <p:spPr>
           <a:xfrm>
-            <a:off x="1353312" y="2999232"/>
-            <a:ext cx="5029200" cy="530352"/>
+            <a:off x="7040880" y="2395728"/>
+            <a:ext cx="4206240" cy="786384"/>
           </a:xfrm>
           <a:prstGeom prst="rect">
             <a:avLst/>
@@ -6695,7 +6744,7 @@
               </a:spcAft>
             </a:pPr>
             <a:r>
-              <a:rPr sz="1200" b="0">
+              <a:rPr sz="1150" b="0">
                 <a:solidFill>
                   <a:srgbClr val="1A1A1A"/>
                 </a:solidFill>
@@ -6708,18 +6757,18 @@
       </p:sp>
       <p:sp>
         <p:nvSpPr>
-          <p:cNvPr id="12" name="Rounded Rectangle 11"/>
+          <p:cNvPr id="14" name="Rounded Rectangle 13"/>
           <p:cNvSpPr/>
           <p:nvPr/>
         </p:nvSpPr>
         <p:spPr>
           <a:xfrm>
-            <a:off x="841248" y="3602736"/>
-            <a:ext cx="5715000" cy="530352"/>
+            <a:off x="841248" y="3328416"/>
+            <a:ext cx="5138928" cy="786384"/>
           </a:xfrm>
           <a:prstGeom prst="roundRect">
             <a:avLst>
-              <a:gd name="adj" fmla="val 6000"/>
+              <a:gd name="adj" fmla="val 7000"/>
             </a:avLst>
           </a:prstGeom>
           <a:solidFill>
@@ -6754,9 +6803,55 @@
           </a:p>
         </p:txBody>
       </p:sp>
+      <p:sp>
+        <p:nvSpPr>
+          <p:cNvPr id="15" name="Rounded Rectangle 14"/>
+          <p:cNvSpPr/>
+          <p:nvPr/>
+        </p:nvSpPr>
+        <p:spPr>
+          <a:xfrm>
+            <a:off x="987552" y="3465576"/>
+            <a:ext cx="512064" cy="512064"/>
+          </a:xfrm>
+          <a:prstGeom prst="roundRect">
+            <a:avLst>
+              <a:gd name="adj" fmla="val 26000"/>
+            </a:avLst>
+          </a:prstGeom>
+          <a:solidFill>
+            <a:srgbClr val="EE0000"/>
+          </a:solidFill>
+          <a:ln>
+            <a:noFill/>
+          </a:ln>
+          <a:effectLst/>
+        </p:spPr>
+        <p:style>
+          <a:lnRef idx="1">
+            <a:schemeClr val="accent1"/>
+          </a:lnRef>
+          <a:fillRef idx="3">
+            <a:schemeClr val="accent1"/>
+          </a:fillRef>
+          <a:effectRef idx="2">
+            <a:schemeClr val="accent1"/>
+          </a:effectRef>
+          <a:fontRef idx="minor">
+            <a:schemeClr val="lt1"/>
+          </a:fontRef>
+        </p:style>
+        <p:txBody>
+          <a:bodyPr rtlCol="0" anchor="ctr"/>
+          <a:lstStyle/>
+          <a:p>
+            <a:pPr algn="ctr"/>
+          </a:p>
+        </p:txBody>
+      </p:sp>
       <p:pic>
         <p:nvPicPr>
-          <p:cNvPr id="13" name="Picture 12" descr="check_steel.png"/>
+          <p:cNvPr id="16" name="Picture 15" descr="check_white.png"/>
           <p:cNvPicPr>
             <a:picLocks noChangeAspect="1"/>
           </p:cNvPicPr>
@@ -6770,8 +6865,8 @@
         </p:blipFill>
         <p:spPr>
           <a:xfrm>
-            <a:off x="987552" y="3749040"/>
-            <a:ext cx="237744" cy="237744"/>
+            <a:off x="1110447" y="3588471"/>
+            <a:ext cx="266273" cy="266273"/>
           </a:xfrm>
           <a:prstGeom prst="rect">
             <a:avLst/>
@@ -6780,14 +6875,14 @@
       </p:pic>
       <p:sp>
         <p:nvSpPr>
-          <p:cNvPr id="14" name="TextBox 13"/>
+          <p:cNvPr id="17" name="TextBox 16"/>
           <p:cNvSpPr txBox="1"/>
           <p:nvPr/>
         </p:nvSpPr>
         <p:spPr>
           <a:xfrm>
-            <a:off x="1353312" y="3602736"/>
-            <a:ext cx="5029200" cy="530352"/>
+            <a:off x="1627632" y="3328416"/>
+            <a:ext cx="4206240" cy="786384"/>
           </a:xfrm>
           <a:prstGeom prst="rect">
             <a:avLst/>
@@ -6812,7 +6907,7 @@
               </a:spcAft>
             </a:pPr>
             <a:r>
-              <a:rPr sz="1200" b="0">
+              <a:rPr sz="1150" b="0">
                 <a:solidFill>
                   <a:srgbClr val="1A1A1A"/>
                 </a:solidFill>
@@ -6825,18 +6920,18 @@
       </p:sp>
       <p:sp>
         <p:nvSpPr>
-          <p:cNvPr id="15" name="Rounded Rectangle 14"/>
+          <p:cNvPr id="18" name="Rounded Rectangle 17"/>
           <p:cNvSpPr/>
           <p:nvPr/>
         </p:nvSpPr>
         <p:spPr>
           <a:xfrm>
-            <a:off x="841248" y="4206240"/>
-            <a:ext cx="5715000" cy="530352"/>
+            <a:off x="6254496" y="3328416"/>
+            <a:ext cx="5138928" cy="786384"/>
           </a:xfrm>
           <a:prstGeom prst="roundRect">
             <a:avLst>
-              <a:gd name="adj" fmla="val 6000"/>
+              <a:gd name="adj" fmla="val 7000"/>
             </a:avLst>
           </a:prstGeom>
           <a:solidFill>
@@ -6871,9 +6966,55 @@
           </a:p>
         </p:txBody>
       </p:sp>
+      <p:sp>
+        <p:nvSpPr>
+          <p:cNvPr id="19" name="Rounded Rectangle 18"/>
+          <p:cNvSpPr/>
+          <p:nvPr/>
+        </p:nvSpPr>
+        <p:spPr>
+          <a:xfrm>
+            <a:off x="6400800" y="3465576"/>
+            <a:ext cx="512064" cy="512064"/>
+          </a:xfrm>
+          <a:prstGeom prst="roundRect">
+            <a:avLst>
+              <a:gd name="adj" fmla="val 26000"/>
+            </a:avLst>
+          </a:prstGeom>
+          <a:solidFill>
+            <a:srgbClr val="EE0000"/>
+          </a:solidFill>
+          <a:ln>
+            <a:noFill/>
+          </a:ln>
+          <a:effectLst/>
+        </p:spPr>
+        <p:style>
+          <a:lnRef idx="1">
+            <a:schemeClr val="accent1"/>
+          </a:lnRef>
+          <a:fillRef idx="3">
+            <a:schemeClr val="accent1"/>
+          </a:fillRef>
+          <a:effectRef idx="2">
+            <a:schemeClr val="accent1"/>
+          </a:effectRef>
+          <a:fontRef idx="minor">
+            <a:schemeClr val="lt1"/>
+          </a:fontRef>
+        </p:style>
+        <p:txBody>
+          <a:bodyPr rtlCol="0" anchor="ctr"/>
+          <a:lstStyle/>
+          <a:p>
+            <a:pPr algn="ctr"/>
+          </a:p>
+        </p:txBody>
+      </p:sp>
       <p:pic>
         <p:nvPicPr>
-          <p:cNvPr id="16" name="Picture 15" descr="check_steel.png"/>
+          <p:cNvPr id="20" name="Picture 19" descr="check_white.png"/>
           <p:cNvPicPr>
             <a:picLocks noChangeAspect="1"/>
           </p:cNvPicPr>
@@ -6887,8 +7028,8 @@
         </p:blipFill>
         <p:spPr>
           <a:xfrm>
-            <a:off x="987552" y="4352544"/>
-            <a:ext cx="237744" cy="237744"/>
+            <a:off x="6523695" y="3588471"/>
+            <a:ext cx="266273" cy="266273"/>
           </a:xfrm>
           <a:prstGeom prst="rect">
             <a:avLst/>
@@ -6897,14 +7038,14 @@
       </p:pic>
       <p:sp>
         <p:nvSpPr>
-          <p:cNvPr id="17" name="TextBox 16"/>
+          <p:cNvPr id="21" name="TextBox 20"/>
           <p:cNvSpPr txBox="1"/>
           <p:nvPr/>
         </p:nvSpPr>
         <p:spPr>
           <a:xfrm>
-            <a:off x="1353312" y="4206240"/>
-            <a:ext cx="5029200" cy="530352"/>
+            <a:off x="7040880" y="3328416"/>
+            <a:ext cx="4206240" cy="786384"/>
           </a:xfrm>
           <a:prstGeom prst="rect">
             <a:avLst/>
@@ -6929,7 +7070,7 @@
               </a:spcAft>
             </a:pPr>
             <a:r>
-              <a:rPr sz="1200" b="0">
+              <a:rPr sz="1150" b="0">
                 <a:solidFill>
                   <a:srgbClr val="1A1A1A"/>
                 </a:solidFill>
@@ -6942,18 +7083,18 @@
       </p:sp>
       <p:sp>
         <p:nvSpPr>
-          <p:cNvPr id="18" name="Rounded Rectangle 17"/>
+          <p:cNvPr id="22" name="Rounded Rectangle 21"/>
           <p:cNvSpPr/>
           <p:nvPr/>
         </p:nvSpPr>
         <p:spPr>
           <a:xfrm>
-            <a:off x="841248" y="4809744"/>
-            <a:ext cx="5715000" cy="530352"/>
+            <a:off x="841248" y="4261104"/>
+            <a:ext cx="5138928" cy="786384"/>
           </a:xfrm>
           <a:prstGeom prst="roundRect">
             <a:avLst>
-              <a:gd name="adj" fmla="val 6000"/>
+              <a:gd name="adj" fmla="val 7000"/>
             </a:avLst>
           </a:prstGeom>
           <a:solidFill>
@@ -6988,9 +7129,55 @@
           </a:p>
         </p:txBody>
       </p:sp>
+      <p:sp>
+        <p:nvSpPr>
+          <p:cNvPr id="23" name="Rounded Rectangle 22"/>
+          <p:cNvSpPr/>
+          <p:nvPr/>
+        </p:nvSpPr>
+        <p:spPr>
+          <a:xfrm>
+            <a:off x="987552" y="4398264"/>
+            <a:ext cx="512064" cy="512064"/>
+          </a:xfrm>
+          <a:prstGeom prst="roundRect">
+            <a:avLst>
+              <a:gd name="adj" fmla="val 26000"/>
+            </a:avLst>
+          </a:prstGeom>
+          <a:solidFill>
+            <a:srgbClr val="EE0000"/>
+          </a:solidFill>
+          <a:ln>
+            <a:noFill/>
+          </a:ln>
+          <a:effectLst/>
+        </p:spPr>
+        <p:style>
+          <a:lnRef idx="1">
+            <a:schemeClr val="accent1"/>
+          </a:lnRef>
+          <a:fillRef idx="3">
+            <a:schemeClr val="accent1"/>
+          </a:fillRef>
+          <a:effectRef idx="2">
+            <a:schemeClr val="accent1"/>
+          </a:effectRef>
+          <a:fontRef idx="minor">
+            <a:schemeClr val="lt1"/>
+          </a:fontRef>
+        </p:style>
+        <p:txBody>
+          <a:bodyPr rtlCol="0" anchor="ctr"/>
+          <a:lstStyle/>
+          <a:p>
+            <a:pPr algn="ctr"/>
+          </a:p>
+        </p:txBody>
+      </p:sp>
       <p:pic>
         <p:nvPicPr>
-          <p:cNvPr id="19" name="Picture 18" descr="check_steel.png"/>
+          <p:cNvPr id="24" name="Picture 23" descr="check_white.png"/>
           <p:cNvPicPr>
             <a:picLocks noChangeAspect="1"/>
           </p:cNvPicPr>
@@ -7004,8 +7191,8 @@
         </p:blipFill>
         <p:spPr>
           <a:xfrm>
-            <a:off x="987552" y="4956048"/>
-            <a:ext cx="237744" cy="237744"/>
+            <a:off x="1110447" y="4521159"/>
+            <a:ext cx="266273" cy="266273"/>
           </a:xfrm>
           <a:prstGeom prst="rect">
             <a:avLst/>
@@ -7014,14 +7201,14 @@
       </p:pic>
       <p:sp>
         <p:nvSpPr>
-          <p:cNvPr id="20" name="TextBox 19"/>
+          <p:cNvPr id="25" name="TextBox 24"/>
           <p:cNvSpPr txBox="1"/>
           <p:nvPr/>
         </p:nvSpPr>
         <p:spPr>
           <a:xfrm>
-            <a:off x="1353312" y="4809744"/>
-            <a:ext cx="5029200" cy="530352"/>
+            <a:off x="1627632" y="4261104"/>
+            <a:ext cx="4206240" cy="786384"/>
           </a:xfrm>
           <a:prstGeom prst="rect">
             <a:avLst/>
@@ -7046,221 +7233,13 @@
               </a:spcAft>
             </a:pPr>
             <a:r>
-              <a:rPr sz="1200" b="0">
+              <a:rPr sz="1150" b="0">
                 <a:solidFill>
                   <a:srgbClr val="1A1A1A"/>
                 </a:solidFill>
                 <a:latin typeface="Red Hat Text"/>
               </a:rPr>
               <a:t>The right default for most services</a:t>
-            </a:r>
-          </a:p>
-        </p:txBody>
-      </p:sp>
-      <p:sp>
-        <p:nvSpPr>
-          <p:cNvPr id="21" name="Rounded Rectangle 20"/>
-          <p:cNvSpPr/>
-          <p:nvPr/>
-        </p:nvSpPr>
-        <p:spPr>
-          <a:xfrm>
-            <a:off x="6812280" y="2395728"/>
-            <a:ext cx="4538167" cy="2944368"/>
-          </a:xfrm>
-          <a:prstGeom prst="roundRect">
-            <a:avLst>
-              <a:gd name="adj" fmla="val 4000"/>
-            </a:avLst>
-          </a:prstGeom>
-          <a:solidFill>
-            <a:srgbClr val="FFFFFF"/>
-          </a:solidFill>
-          <a:ln w="15240">
-            <a:solidFill>
-              <a:srgbClr val="DDE1E6"/>
-            </a:solidFill>
-          </a:ln>
-          <a:effectLst/>
-        </p:spPr>
-        <p:style>
-          <a:lnRef idx="1">
-            <a:schemeClr val="accent1"/>
-          </a:lnRef>
-          <a:fillRef idx="3">
-            <a:schemeClr val="accent1"/>
-          </a:fillRef>
-          <a:effectRef idx="2">
-            <a:schemeClr val="accent1"/>
-          </a:effectRef>
-          <a:fontRef idx="minor">
-            <a:schemeClr val="lt1"/>
-          </a:fontRef>
-        </p:style>
-        <p:txBody>
-          <a:bodyPr rtlCol="0" anchor="ctr"/>
-          <a:lstStyle/>
-          <a:p>
-            <a:pPr algn="ctr"/>
-          </a:p>
-        </p:txBody>
-      </p:sp>
-      <p:sp>
-        <p:nvSpPr>
-          <p:cNvPr id="22" name="Rounded Rectangle 21"/>
-          <p:cNvSpPr/>
-          <p:nvPr/>
-        </p:nvSpPr>
-        <p:spPr>
-          <a:xfrm>
-            <a:off x="7013448" y="2596896"/>
-            <a:ext cx="1298448" cy="310896"/>
-          </a:xfrm>
-          <a:prstGeom prst="roundRect">
-            <a:avLst>
-              <a:gd name="adj" fmla="val 50000"/>
-            </a:avLst>
-          </a:prstGeom>
-          <a:solidFill>
-            <a:srgbClr val="FCECEC"/>
-          </a:solidFill>
-          <a:ln>
-            <a:noFill/>
-          </a:ln>
-          <a:effectLst/>
-        </p:spPr>
-        <p:style>
-          <a:lnRef idx="1">
-            <a:schemeClr val="accent1"/>
-          </a:lnRef>
-          <a:fillRef idx="3">
-            <a:schemeClr val="accent1"/>
-          </a:fillRef>
-          <a:effectRef idx="2">
-            <a:schemeClr val="accent1"/>
-          </a:effectRef>
-          <a:fontRef idx="minor">
-            <a:schemeClr val="lt1"/>
-          </a:fontRef>
-        </p:style>
-        <p:txBody>
-          <a:bodyPr rtlCol="0" anchor="ctr"/>
-          <a:lstStyle/>
-          <a:p>
-            <a:pPr algn="ctr"/>
-          </a:p>
-        </p:txBody>
-      </p:sp>
-      <p:sp>
-        <p:nvSpPr>
-          <p:cNvPr id="23" name="TextBox 22"/>
-          <p:cNvSpPr txBox="1"/>
-          <p:nvPr/>
-        </p:nvSpPr>
-        <p:spPr>
-          <a:xfrm>
-            <a:off x="7013448" y="2596896"/>
-            <a:ext cx="1298448" cy="310896"/>
-          </a:xfrm>
-          <a:prstGeom prst="rect">
-            <a:avLst/>
-          </a:prstGeom>
-          <a:noFill/>
-        </p:spPr>
-        <p:txBody>
-          <a:bodyPr wrap="none" anchor="ctr" lIns="0" rIns="0" tIns="0" bIns="0">
-            <a:spAutoFit/>
-          </a:bodyPr>
-          <a:lstStyle/>
-          <a:p>
-            <a:pPr algn="ctr">
-              <a:lnSpc>
-                <a:spcPct val="106000"/>
-              </a:lnSpc>
-              <a:spcBef>
-                <a:spcPts val="0"/>
-              </a:spcBef>
-              <a:spcAft>
-                <a:spcPts val="0"/>
-              </a:spcAft>
-            </a:pPr>
-            <a:r>
-              <a:rPr sz="850" b="1">
-                <a:solidFill>
-                  <a:srgbClr val="B80000"/>
-                </a:solidFill>
-                <a:latin typeface="Red Hat Display"/>
-              </a:rPr>
-              <a:t>MEDIA PASS</a:t>
-            </a:r>
-          </a:p>
-        </p:txBody>
-      </p:sp>
-      <p:pic>
-        <p:nvPicPr>
-          <p:cNvPr id="24" name="Picture 23" descr="eye_slate.png"/>
-          <p:cNvPicPr>
-            <a:picLocks noChangeAspect="1"/>
-          </p:cNvPicPr>
-          <p:nvPr/>
-        </p:nvPicPr>
-        <p:blipFill>
-          <a:blip r:embed="rId4"/>
-          <a:stretch>
-            <a:fillRect/>
-          </a:stretch>
-        </p:blipFill>
-        <p:spPr>
-          <a:xfrm>
-            <a:off x="8843619" y="3108960"/>
-            <a:ext cx="475488" cy="475488"/>
-          </a:xfrm>
-          <a:prstGeom prst="rect">
-            <a:avLst/>
-          </a:prstGeom>
-        </p:spPr>
-      </p:pic>
-      <p:sp>
-        <p:nvSpPr>
-          <p:cNvPr id="25" name="TextBox 24"/>
-          <p:cNvSpPr txBox="1"/>
-          <p:nvPr/>
-        </p:nvSpPr>
-        <p:spPr>
-          <a:xfrm>
-            <a:off x="7050024" y="3721608"/>
-            <a:ext cx="4062679" cy="1481328"/>
-          </a:xfrm>
-          <a:prstGeom prst="rect">
-            <a:avLst/>
-          </a:prstGeom>
-          <a:noFill/>
-        </p:spPr>
-        <p:txBody>
-          <a:bodyPr wrap="square" anchor="t" lIns="0" rIns="0" tIns="0" bIns="0">
-            <a:spAutoFit/>
-          </a:bodyPr>
-          <a:lstStyle/>
-          <a:p>
-            <a:pPr algn="l">
-              <a:lnSpc>
-                <a:spcPct val="120000"/>
-              </a:lnSpc>
-              <a:spcBef>
-                <a:spcPts val="0"/>
-              </a:spcBef>
-              <a:spcAft>
-                <a:spcPts val="0"/>
-              </a:spcAft>
-            </a:pPr>
-            <a:r>
-              <a:rPr sz="950" b="0">
-                <a:solidFill>
-                  <a:srgbClr val="8A9099"/>
-                </a:solidFill>
-                <a:latin typeface="Red Hat Text"/>
-              </a:rPr>
-              <a:t>source → [builder image] → image → Deployment → Route, labeled "S2I: you write no Dockerfile."</a:t>
             </a:r>
           </a:p>
         </p:txBody>
@@ -7568,11 +7547,11 @@
         <p:spPr>
           <a:xfrm>
             <a:off x="841248" y="2395728"/>
-            <a:ext cx="5715000" cy="530352"/>
+            <a:ext cx="5138928" cy="786384"/>
           </a:xfrm>
           <a:prstGeom prst="roundRect">
             <a:avLst>
-              <a:gd name="adj" fmla="val 6000"/>
+              <a:gd name="adj" fmla="val 7000"/>
             </a:avLst>
           </a:prstGeom>
           <a:solidFill>
@@ -7607,9 +7586,55 @@
           </a:p>
         </p:txBody>
       </p:sp>
+      <p:sp>
+        <p:nvSpPr>
+          <p:cNvPr id="7" name="Rounded Rectangle 6"/>
+          <p:cNvSpPr/>
+          <p:nvPr/>
+        </p:nvSpPr>
+        <p:spPr>
+          <a:xfrm>
+            <a:off x="987552" y="2532888"/>
+            <a:ext cx="512064" cy="512064"/>
+          </a:xfrm>
+          <a:prstGeom prst="roundRect">
+            <a:avLst>
+              <a:gd name="adj" fmla="val 26000"/>
+            </a:avLst>
+          </a:prstGeom>
+          <a:solidFill>
+            <a:srgbClr val="EE0000"/>
+          </a:solidFill>
+          <a:ln>
+            <a:noFill/>
+          </a:ln>
+          <a:effectLst/>
+        </p:spPr>
+        <p:style>
+          <a:lnRef idx="1">
+            <a:schemeClr val="accent1"/>
+          </a:lnRef>
+          <a:fillRef idx="3">
+            <a:schemeClr val="accent1"/>
+          </a:fillRef>
+          <a:effectRef idx="2">
+            <a:schemeClr val="accent1"/>
+          </a:effectRef>
+          <a:fontRef idx="minor">
+            <a:schemeClr val="lt1"/>
+          </a:fontRef>
+        </p:style>
+        <p:txBody>
+          <a:bodyPr rtlCol="0" anchor="ctr"/>
+          <a:lstStyle/>
+          <a:p>
+            <a:pPr algn="ctr"/>
+          </a:p>
+        </p:txBody>
+      </p:sp>
       <p:pic>
         <p:nvPicPr>
-          <p:cNvPr id="7" name="Picture 6" descr="check_steel.png"/>
+          <p:cNvPr id="8" name="Picture 7" descr="check_white.png"/>
           <p:cNvPicPr>
             <a:picLocks noChangeAspect="1"/>
           </p:cNvPicPr>
@@ -7623,8 +7648,8 @@
         </p:blipFill>
         <p:spPr>
           <a:xfrm>
-            <a:off x="987552" y="2542032"/>
-            <a:ext cx="237744" cy="237744"/>
+            <a:off x="1110447" y="2655783"/>
+            <a:ext cx="266273" cy="266273"/>
           </a:xfrm>
           <a:prstGeom prst="rect">
             <a:avLst/>
@@ -7633,14 +7658,14 @@
       </p:pic>
       <p:sp>
         <p:nvSpPr>
-          <p:cNvPr id="8" name="TextBox 7"/>
+          <p:cNvPr id="9" name="TextBox 8"/>
           <p:cNvSpPr txBox="1"/>
           <p:nvPr/>
         </p:nvSpPr>
         <p:spPr>
           <a:xfrm>
-            <a:off x="1353312" y="2395728"/>
-            <a:ext cx="5029200" cy="530352"/>
+            <a:off x="1627632" y="2395728"/>
+            <a:ext cx="4206240" cy="786384"/>
           </a:xfrm>
           <a:prstGeom prst="rect">
             <a:avLst/>
@@ -7665,7 +7690,7 @@
               </a:spcAft>
             </a:pPr>
             <a:r>
-              <a:rPr sz="1200" b="0">
+              <a:rPr sz="1150" b="0">
                 <a:solidFill>
                   <a:srgbClr val="1A1A1A"/>
                 </a:solidFill>
@@ -7678,18 +7703,18 @@
       </p:sp>
       <p:sp>
         <p:nvSpPr>
-          <p:cNvPr id="9" name="Rounded Rectangle 8"/>
+          <p:cNvPr id="10" name="Rounded Rectangle 9"/>
           <p:cNvSpPr/>
           <p:nvPr/>
         </p:nvSpPr>
         <p:spPr>
           <a:xfrm>
-            <a:off x="841248" y="2999232"/>
-            <a:ext cx="5715000" cy="530352"/>
+            <a:off x="6254496" y="2395728"/>
+            <a:ext cx="5138928" cy="786384"/>
           </a:xfrm>
           <a:prstGeom prst="roundRect">
             <a:avLst>
-              <a:gd name="adj" fmla="val 6000"/>
+              <a:gd name="adj" fmla="val 7000"/>
             </a:avLst>
           </a:prstGeom>
           <a:solidFill>
@@ -7724,9 +7749,55 @@
           </a:p>
         </p:txBody>
       </p:sp>
+      <p:sp>
+        <p:nvSpPr>
+          <p:cNvPr id="11" name="Rounded Rectangle 10"/>
+          <p:cNvSpPr/>
+          <p:nvPr/>
+        </p:nvSpPr>
+        <p:spPr>
+          <a:xfrm>
+            <a:off x="6400800" y="2532888"/>
+            <a:ext cx="512064" cy="512064"/>
+          </a:xfrm>
+          <a:prstGeom prst="roundRect">
+            <a:avLst>
+              <a:gd name="adj" fmla="val 26000"/>
+            </a:avLst>
+          </a:prstGeom>
+          <a:solidFill>
+            <a:srgbClr val="EE0000"/>
+          </a:solidFill>
+          <a:ln>
+            <a:noFill/>
+          </a:ln>
+          <a:effectLst/>
+        </p:spPr>
+        <p:style>
+          <a:lnRef idx="1">
+            <a:schemeClr val="accent1"/>
+          </a:lnRef>
+          <a:fillRef idx="3">
+            <a:schemeClr val="accent1"/>
+          </a:fillRef>
+          <a:effectRef idx="2">
+            <a:schemeClr val="accent1"/>
+          </a:effectRef>
+          <a:fontRef idx="minor">
+            <a:schemeClr val="lt1"/>
+          </a:fontRef>
+        </p:style>
+        <p:txBody>
+          <a:bodyPr rtlCol="0" anchor="ctr"/>
+          <a:lstStyle/>
+          <a:p>
+            <a:pPr algn="ctr"/>
+          </a:p>
+        </p:txBody>
+      </p:sp>
       <p:pic>
         <p:nvPicPr>
-          <p:cNvPr id="10" name="Picture 9" descr="check_steel.png"/>
+          <p:cNvPr id="12" name="Picture 11" descr="check_white.png"/>
           <p:cNvPicPr>
             <a:picLocks noChangeAspect="1"/>
           </p:cNvPicPr>
@@ -7740,8 +7811,8 @@
         </p:blipFill>
         <p:spPr>
           <a:xfrm>
-            <a:off x="987552" y="3145536"/>
-            <a:ext cx="237744" cy="237744"/>
+            <a:off x="6523695" y="2655783"/>
+            <a:ext cx="266273" cy="266273"/>
           </a:xfrm>
           <a:prstGeom prst="rect">
             <a:avLst/>
@@ -7750,14 +7821,14 @@
       </p:pic>
       <p:sp>
         <p:nvSpPr>
-          <p:cNvPr id="11" name="TextBox 10"/>
+          <p:cNvPr id="13" name="TextBox 12"/>
           <p:cNvSpPr txBox="1"/>
           <p:nvPr/>
         </p:nvSpPr>
         <p:spPr>
           <a:xfrm>
-            <a:off x="1353312" y="2999232"/>
-            <a:ext cx="5029200" cy="530352"/>
+            <a:off x="7040880" y="2395728"/>
+            <a:ext cx="4206240" cy="786384"/>
           </a:xfrm>
           <a:prstGeom prst="rect">
             <a:avLst/>
@@ -7782,7 +7853,7 @@
               </a:spcAft>
             </a:pPr>
             <a:r>
-              <a:rPr sz="1200" b="0">
+              <a:rPr sz="1150" b="0">
                 <a:solidFill>
                   <a:srgbClr val="1A1A1A"/>
                 </a:solidFill>
@@ -7795,18 +7866,18 @@
       </p:sp>
       <p:sp>
         <p:nvSpPr>
-          <p:cNvPr id="12" name="Rounded Rectangle 11"/>
+          <p:cNvPr id="14" name="Rounded Rectangle 13"/>
           <p:cNvSpPr/>
           <p:nvPr/>
         </p:nvSpPr>
         <p:spPr>
           <a:xfrm>
-            <a:off x="841248" y="3602736"/>
-            <a:ext cx="5715000" cy="530352"/>
+            <a:off x="841248" y="3328416"/>
+            <a:ext cx="5138928" cy="786384"/>
           </a:xfrm>
           <a:prstGeom prst="roundRect">
             <a:avLst>
-              <a:gd name="adj" fmla="val 6000"/>
+              <a:gd name="adj" fmla="val 7000"/>
             </a:avLst>
           </a:prstGeom>
           <a:solidFill>
@@ -7841,9 +7912,55 @@
           </a:p>
         </p:txBody>
       </p:sp>
+      <p:sp>
+        <p:nvSpPr>
+          <p:cNvPr id="15" name="Rounded Rectangle 14"/>
+          <p:cNvSpPr/>
+          <p:nvPr/>
+        </p:nvSpPr>
+        <p:spPr>
+          <a:xfrm>
+            <a:off x="987552" y="3465576"/>
+            <a:ext cx="512064" cy="512064"/>
+          </a:xfrm>
+          <a:prstGeom prst="roundRect">
+            <a:avLst>
+              <a:gd name="adj" fmla="val 26000"/>
+            </a:avLst>
+          </a:prstGeom>
+          <a:solidFill>
+            <a:srgbClr val="EE0000"/>
+          </a:solidFill>
+          <a:ln>
+            <a:noFill/>
+          </a:ln>
+          <a:effectLst/>
+        </p:spPr>
+        <p:style>
+          <a:lnRef idx="1">
+            <a:schemeClr val="accent1"/>
+          </a:lnRef>
+          <a:fillRef idx="3">
+            <a:schemeClr val="accent1"/>
+          </a:fillRef>
+          <a:effectRef idx="2">
+            <a:schemeClr val="accent1"/>
+          </a:effectRef>
+          <a:fontRef idx="minor">
+            <a:schemeClr val="lt1"/>
+          </a:fontRef>
+        </p:style>
+        <p:txBody>
+          <a:bodyPr rtlCol="0" anchor="ctr"/>
+          <a:lstStyle/>
+          <a:p>
+            <a:pPr algn="ctr"/>
+          </a:p>
+        </p:txBody>
+      </p:sp>
       <p:pic>
         <p:nvPicPr>
-          <p:cNvPr id="13" name="Picture 12" descr="check_steel.png"/>
+          <p:cNvPr id="16" name="Picture 15" descr="check_white.png"/>
           <p:cNvPicPr>
             <a:picLocks noChangeAspect="1"/>
           </p:cNvPicPr>
@@ -7857,8 +7974,8 @@
         </p:blipFill>
         <p:spPr>
           <a:xfrm>
-            <a:off x="987552" y="3749040"/>
-            <a:ext cx="237744" cy="237744"/>
+            <a:off x="1110447" y="3588471"/>
+            <a:ext cx="266273" cy="266273"/>
           </a:xfrm>
           <a:prstGeom prst="rect">
             <a:avLst/>
@@ -7867,14 +7984,14 @@
       </p:pic>
       <p:sp>
         <p:nvSpPr>
-          <p:cNvPr id="14" name="TextBox 13"/>
+          <p:cNvPr id="17" name="TextBox 16"/>
           <p:cNvSpPr txBox="1"/>
           <p:nvPr/>
         </p:nvSpPr>
         <p:spPr>
           <a:xfrm>
-            <a:off x="1353312" y="3602736"/>
-            <a:ext cx="5029200" cy="530352"/>
+            <a:off x="1627632" y="3328416"/>
+            <a:ext cx="4206240" cy="786384"/>
           </a:xfrm>
           <a:prstGeom prst="rect">
             <a:avLst/>
@@ -7899,7 +8016,7 @@
               </a:spcAft>
             </a:pPr>
             <a:r>
-              <a:rPr sz="1200" b="0">
+              <a:rPr sz="1150" b="0">
                 <a:solidFill>
                   <a:srgbClr val="1A1A1A"/>
                 </a:solidFill>
@@ -7912,18 +8029,18 @@
       </p:sp>
       <p:sp>
         <p:nvSpPr>
-          <p:cNvPr id="15" name="Rounded Rectangle 14"/>
+          <p:cNvPr id="18" name="Rounded Rectangle 17"/>
           <p:cNvSpPr/>
           <p:nvPr/>
         </p:nvSpPr>
         <p:spPr>
           <a:xfrm>
-            <a:off x="841248" y="4206240"/>
-            <a:ext cx="5715000" cy="530352"/>
+            <a:off x="6254496" y="3328416"/>
+            <a:ext cx="5138928" cy="786384"/>
           </a:xfrm>
           <a:prstGeom prst="roundRect">
             <a:avLst>
-              <a:gd name="adj" fmla="val 6000"/>
+              <a:gd name="adj" fmla="val 7000"/>
             </a:avLst>
           </a:prstGeom>
           <a:solidFill>
@@ -7958,9 +8075,55 @@
           </a:p>
         </p:txBody>
       </p:sp>
+      <p:sp>
+        <p:nvSpPr>
+          <p:cNvPr id="19" name="Rounded Rectangle 18"/>
+          <p:cNvSpPr/>
+          <p:nvPr/>
+        </p:nvSpPr>
+        <p:spPr>
+          <a:xfrm>
+            <a:off x="6400800" y="3465576"/>
+            <a:ext cx="512064" cy="512064"/>
+          </a:xfrm>
+          <a:prstGeom prst="roundRect">
+            <a:avLst>
+              <a:gd name="adj" fmla="val 26000"/>
+            </a:avLst>
+          </a:prstGeom>
+          <a:solidFill>
+            <a:srgbClr val="EE0000"/>
+          </a:solidFill>
+          <a:ln>
+            <a:noFill/>
+          </a:ln>
+          <a:effectLst/>
+        </p:spPr>
+        <p:style>
+          <a:lnRef idx="1">
+            <a:schemeClr val="accent1"/>
+          </a:lnRef>
+          <a:fillRef idx="3">
+            <a:schemeClr val="accent1"/>
+          </a:fillRef>
+          <a:effectRef idx="2">
+            <a:schemeClr val="accent1"/>
+          </a:effectRef>
+          <a:fontRef idx="minor">
+            <a:schemeClr val="lt1"/>
+          </a:fontRef>
+        </p:style>
+        <p:txBody>
+          <a:bodyPr rtlCol="0" anchor="ctr"/>
+          <a:lstStyle/>
+          <a:p>
+            <a:pPr algn="ctr"/>
+          </a:p>
+        </p:txBody>
+      </p:sp>
       <p:pic>
         <p:nvPicPr>
-          <p:cNvPr id="16" name="Picture 15" descr="check_steel.png"/>
+          <p:cNvPr id="20" name="Picture 19" descr="check_white.png"/>
           <p:cNvPicPr>
             <a:picLocks noChangeAspect="1"/>
           </p:cNvPicPr>
@@ -7974,8 +8137,8 @@
         </p:blipFill>
         <p:spPr>
           <a:xfrm>
-            <a:off x="987552" y="4352544"/>
-            <a:ext cx="237744" cy="237744"/>
+            <a:off x="6523695" y="3588471"/>
+            <a:ext cx="266273" cy="266273"/>
           </a:xfrm>
           <a:prstGeom prst="rect">
             <a:avLst/>
@@ -7984,14 +8147,14 @@
       </p:pic>
       <p:sp>
         <p:nvSpPr>
-          <p:cNvPr id="17" name="TextBox 16"/>
+          <p:cNvPr id="21" name="TextBox 20"/>
           <p:cNvSpPr txBox="1"/>
           <p:nvPr/>
         </p:nvSpPr>
         <p:spPr>
           <a:xfrm>
-            <a:off x="1353312" y="4206240"/>
-            <a:ext cx="5029200" cy="530352"/>
+            <a:off x="7040880" y="3328416"/>
+            <a:ext cx="4206240" cy="786384"/>
           </a:xfrm>
           <a:prstGeom prst="rect">
             <a:avLst/>
@@ -8016,7 +8179,7 @@
               </a:spcAft>
             </a:pPr>
             <a:r>
-              <a:rPr sz="1200" b="0">
+              <a:rPr sz="1150" b="0">
                 <a:solidFill>
                   <a:srgbClr val="1A1A1A"/>
                 </a:solidFill>
@@ -8029,18 +8192,18 @@
       </p:sp>
       <p:sp>
         <p:nvSpPr>
-          <p:cNvPr id="18" name="Rounded Rectangle 17"/>
+          <p:cNvPr id="22" name="Rounded Rectangle 21"/>
           <p:cNvSpPr/>
           <p:nvPr/>
         </p:nvSpPr>
         <p:spPr>
           <a:xfrm>
-            <a:off x="841248" y="4809744"/>
-            <a:ext cx="5715000" cy="530352"/>
+            <a:off x="841248" y="4261104"/>
+            <a:ext cx="5138928" cy="786384"/>
           </a:xfrm>
           <a:prstGeom prst="roundRect">
             <a:avLst>
-              <a:gd name="adj" fmla="val 6000"/>
+              <a:gd name="adj" fmla="val 7000"/>
             </a:avLst>
           </a:prstGeom>
           <a:solidFill>
@@ -8075,9 +8238,55 @@
           </a:p>
         </p:txBody>
       </p:sp>
+      <p:sp>
+        <p:nvSpPr>
+          <p:cNvPr id="23" name="Rounded Rectangle 22"/>
+          <p:cNvSpPr/>
+          <p:nvPr/>
+        </p:nvSpPr>
+        <p:spPr>
+          <a:xfrm>
+            <a:off x="987552" y="4398264"/>
+            <a:ext cx="512064" cy="512064"/>
+          </a:xfrm>
+          <a:prstGeom prst="roundRect">
+            <a:avLst>
+              <a:gd name="adj" fmla="val 26000"/>
+            </a:avLst>
+          </a:prstGeom>
+          <a:solidFill>
+            <a:srgbClr val="EE0000"/>
+          </a:solidFill>
+          <a:ln>
+            <a:noFill/>
+          </a:ln>
+          <a:effectLst/>
+        </p:spPr>
+        <p:style>
+          <a:lnRef idx="1">
+            <a:schemeClr val="accent1"/>
+          </a:lnRef>
+          <a:fillRef idx="3">
+            <a:schemeClr val="accent1"/>
+          </a:fillRef>
+          <a:effectRef idx="2">
+            <a:schemeClr val="accent1"/>
+          </a:effectRef>
+          <a:fontRef idx="minor">
+            <a:schemeClr val="lt1"/>
+          </a:fontRef>
+        </p:style>
+        <p:txBody>
+          <a:bodyPr rtlCol="0" anchor="ctr"/>
+          <a:lstStyle/>
+          <a:p>
+            <a:pPr algn="ctr"/>
+          </a:p>
+        </p:txBody>
+      </p:sp>
       <p:pic>
         <p:nvPicPr>
-          <p:cNvPr id="19" name="Picture 18" descr="check_steel.png"/>
+          <p:cNvPr id="24" name="Picture 23" descr="check_white.png"/>
           <p:cNvPicPr>
             <a:picLocks noChangeAspect="1"/>
           </p:cNvPicPr>
@@ -8091,8 +8300,8 @@
         </p:blipFill>
         <p:spPr>
           <a:xfrm>
-            <a:off x="987552" y="4956048"/>
-            <a:ext cx="237744" cy="237744"/>
+            <a:off x="1110447" y="4521159"/>
+            <a:ext cx="266273" cy="266273"/>
           </a:xfrm>
           <a:prstGeom prst="rect">
             <a:avLst/>
@@ -8101,14 +8310,14 @@
       </p:pic>
       <p:sp>
         <p:nvSpPr>
-          <p:cNvPr id="20" name="TextBox 19"/>
+          <p:cNvPr id="25" name="TextBox 24"/>
           <p:cNvSpPr txBox="1"/>
           <p:nvPr/>
         </p:nvSpPr>
         <p:spPr>
           <a:xfrm>
-            <a:off x="1353312" y="4809744"/>
-            <a:ext cx="5029200" cy="530352"/>
+            <a:off x="1627632" y="4261104"/>
+            <a:ext cx="4206240" cy="786384"/>
           </a:xfrm>
           <a:prstGeom prst="rect">
             <a:avLst/>
@@ -8133,221 +8342,13 @@
               </a:spcAft>
             </a:pPr>
             <a:r>
-              <a:rPr sz="1200" b="0">
+              <a:rPr sz="1150" b="0">
                 <a:solidFill>
                   <a:srgbClr val="1A1A1A"/>
                 </a:solidFill>
                 <a:latin typeface="Red Hat Text"/>
               </a:rPr>
               <a:t>Provenance is a security question</a:t>
-            </a:r>
-          </a:p>
-        </p:txBody>
-      </p:sp>
-      <p:sp>
-        <p:nvSpPr>
-          <p:cNvPr id="21" name="Rounded Rectangle 20"/>
-          <p:cNvSpPr/>
-          <p:nvPr/>
-        </p:nvSpPr>
-        <p:spPr>
-          <a:xfrm>
-            <a:off x="6812280" y="2395728"/>
-            <a:ext cx="4538167" cy="2944368"/>
-          </a:xfrm>
-          <a:prstGeom prst="roundRect">
-            <a:avLst>
-              <a:gd name="adj" fmla="val 4000"/>
-            </a:avLst>
-          </a:prstGeom>
-          <a:solidFill>
-            <a:srgbClr val="FFFFFF"/>
-          </a:solidFill>
-          <a:ln w="15240">
-            <a:solidFill>
-              <a:srgbClr val="DDE1E6"/>
-            </a:solidFill>
-          </a:ln>
-          <a:effectLst/>
-        </p:spPr>
-        <p:style>
-          <a:lnRef idx="1">
-            <a:schemeClr val="accent1"/>
-          </a:lnRef>
-          <a:fillRef idx="3">
-            <a:schemeClr val="accent1"/>
-          </a:fillRef>
-          <a:effectRef idx="2">
-            <a:schemeClr val="accent1"/>
-          </a:effectRef>
-          <a:fontRef idx="minor">
-            <a:schemeClr val="lt1"/>
-          </a:fontRef>
-        </p:style>
-        <p:txBody>
-          <a:bodyPr rtlCol="0" anchor="ctr"/>
-          <a:lstStyle/>
-          <a:p>
-            <a:pPr algn="ctr"/>
-          </a:p>
-        </p:txBody>
-      </p:sp>
-      <p:sp>
-        <p:nvSpPr>
-          <p:cNvPr id="22" name="Rounded Rectangle 21"/>
-          <p:cNvSpPr/>
-          <p:nvPr/>
-        </p:nvSpPr>
-        <p:spPr>
-          <a:xfrm>
-            <a:off x="7013448" y="2596896"/>
-            <a:ext cx="1298448" cy="310896"/>
-          </a:xfrm>
-          <a:prstGeom prst="roundRect">
-            <a:avLst>
-              <a:gd name="adj" fmla="val 50000"/>
-            </a:avLst>
-          </a:prstGeom>
-          <a:solidFill>
-            <a:srgbClr val="FCECEC"/>
-          </a:solidFill>
-          <a:ln>
-            <a:noFill/>
-          </a:ln>
-          <a:effectLst/>
-        </p:spPr>
-        <p:style>
-          <a:lnRef idx="1">
-            <a:schemeClr val="accent1"/>
-          </a:lnRef>
-          <a:fillRef idx="3">
-            <a:schemeClr val="accent1"/>
-          </a:fillRef>
-          <a:effectRef idx="2">
-            <a:schemeClr val="accent1"/>
-          </a:effectRef>
-          <a:fontRef idx="minor">
-            <a:schemeClr val="lt1"/>
-          </a:fontRef>
-        </p:style>
-        <p:txBody>
-          <a:bodyPr rtlCol="0" anchor="ctr"/>
-          <a:lstStyle/>
-          <a:p>
-            <a:pPr algn="ctr"/>
-          </a:p>
-        </p:txBody>
-      </p:sp>
-      <p:sp>
-        <p:nvSpPr>
-          <p:cNvPr id="23" name="TextBox 22"/>
-          <p:cNvSpPr txBox="1"/>
-          <p:nvPr/>
-        </p:nvSpPr>
-        <p:spPr>
-          <a:xfrm>
-            <a:off x="7013448" y="2596896"/>
-            <a:ext cx="1298448" cy="310896"/>
-          </a:xfrm>
-          <a:prstGeom prst="rect">
-            <a:avLst/>
-          </a:prstGeom>
-          <a:noFill/>
-        </p:spPr>
-        <p:txBody>
-          <a:bodyPr wrap="none" anchor="ctr" lIns="0" rIns="0" tIns="0" bIns="0">
-            <a:spAutoFit/>
-          </a:bodyPr>
-          <a:lstStyle/>
-          <a:p>
-            <a:pPr algn="ctr">
-              <a:lnSpc>
-                <a:spcPct val="106000"/>
-              </a:lnSpc>
-              <a:spcBef>
-                <a:spcPts val="0"/>
-              </a:spcBef>
-              <a:spcAft>
-                <a:spcPts val="0"/>
-              </a:spcAft>
-            </a:pPr>
-            <a:r>
-              <a:rPr sz="850" b="1">
-                <a:solidFill>
-                  <a:srgbClr val="B80000"/>
-                </a:solidFill>
-                <a:latin typeface="Red Hat Display"/>
-              </a:rPr>
-              <a:t>MEDIA PASS</a:t>
-            </a:r>
-          </a:p>
-        </p:txBody>
-      </p:sp>
-      <p:pic>
-        <p:nvPicPr>
-          <p:cNvPr id="24" name="Picture 23" descr="eye_slate.png"/>
-          <p:cNvPicPr>
-            <a:picLocks noChangeAspect="1"/>
-          </p:cNvPicPr>
-          <p:nvPr/>
-        </p:nvPicPr>
-        <p:blipFill>
-          <a:blip r:embed="rId4"/>
-          <a:stretch>
-            <a:fillRect/>
-          </a:stretch>
-        </p:blipFill>
-        <p:spPr>
-          <a:xfrm>
-            <a:off x="8843619" y="3108960"/>
-            <a:ext cx="475488" cy="475488"/>
-          </a:xfrm>
-          <a:prstGeom prst="rect">
-            <a:avLst/>
-          </a:prstGeom>
-        </p:spPr>
-      </p:pic>
-      <p:sp>
-        <p:nvSpPr>
-          <p:cNvPr id="25" name="TextBox 24"/>
-          <p:cNvSpPr txBox="1"/>
-          <p:nvPr/>
-        </p:nvSpPr>
-        <p:spPr>
-          <a:xfrm>
-            <a:off x="7050024" y="3721608"/>
-            <a:ext cx="4062679" cy="1481328"/>
-          </a:xfrm>
-          <a:prstGeom prst="rect">
-            <a:avLst/>
-          </a:prstGeom>
-          <a:noFill/>
-        </p:spPr>
-        <p:txBody>
-          <a:bodyPr wrap="square" anchor="t" lIns="0" rIns="0" tIns="0" bIns="0">
-            <a:spAutoFit/>
-          </a:bodyPr>
-          <a:lstStyle/>
-          <a:p>
-            <a:pPr algn="l">
-              <a:lnSpc>
-                <a:spcPct val="120000"/>
-              </a:lnSpc>
-              <a:spcBef>
-                <a:spcPts val="0"/>
-              </a:spcBef>
-              <a:spcAft>
-                <a:spcPts val="0"/>
-              </a:spcAft>
-            </a:pPr>
-            <a:r>
-              <a:rPr sz="950" b="0">
-                <a:solidFill>
-                  <a:srgbClr val="8A9099"/>
-                </a:solidFill>
-                <a:latin typeface="Red Hat Text"/>
-              </a:rPr>
-              <a:t>Two registry boxes — access.redhat.com (open padlock, "200 anonymous") vs registry.redhat.io (closed padlock, "401 needs credentials").</a:t>
             </a:r>
           </a:p>
         </p:txBody>
@@ -8655,11 +8656,11 @@
         <p:spPr>
           <a:xfrm>
             <a:off x="841248" y="2395728"/>
-            <a:ext cx="5715000" cy="530352"/>
+            <a:ext cx="5138928" cy="786384"/>
           </a:xfrm>
           <a:prstGeom prst="roundRect">
             <a:avLst>
-              <a:gd name="adj" fmla="val 6000"/>
+              <a:gd name="adj" fmla="val 7000"/>
             </a:avLst>
           </a:prstGeom>
           <a:solidFill>
@@ -8694,9 +8695,55 @@
           </a:p>
         </p:txBody>
       </p:sp>
+      <p:sp>
+        <p:nvSpPr>
+          <p:cNvPr id="7" name="Rounded Rectangle 6"/>
+          <p:cNvSpPr/>
+          <p:nvPr/>
+        </p:nvSpPr>
+        <p:spPr>
+          <a:xfrm>
+            <a:off x="987552" y="2532888"/>
+            <a:ext cx="512064" cy="512064"/>
+          </a:xfrm>
+          <a:prstGeom prst="roundRect">
+            <a:avLst>
+              <a:gd name="adj" fmla="val 26000"/>
+            </a:avLst>
+          </a:prstGeom>
+          <a:solidFill>
+            <a:srgbClr val="EE0000"/>
+          </a:solidFill>
+          <a:ln>
+            <a:noFill/>
+          </a:ln>
+          <a:effectLst/>
+        </p:spPr>
+        <p:style>
+          <a:lnRef idx="1">
+            <a:schemeClr val="accent1"/>
+          </a:lnRef>
+          <a:fillRef idx="3">
+            <a:schemeClr val="accent1"/>
+          </a:fillRef>
+          <a:effectRef idx="2">
+            <a:schemeClr val="accent1"/>
+          </a:effectRef>
+          <a:fontRef idx="minor">
+            <a:schemeClr val="lt1"/>
+          </a:fontRef>
+        </p:style>
+        <p:txBody>
+          <a:bodyPr rtlCol="0" anchor="ctr"/>
+          <a:lstStyle/>
+          <a:p>
+            <a:pPr algn="ctr"/>
+          </a:p>
+        </p:txBody>
+      </p:sp>
       <p:pic>
         <p:nvPicPr>
-          <p:cNvPr id="7" name="Picture 6" descr="check_steel.png"/>
+          <p:cNvPr id="8" name="Picture 7" descr="check_white.png"/>
           <p:cNvPicPr>
             <a:picLocks noChangeAspect="1"/>
           </p:cNvPicPr>
@@ -8710,8 +8757,8 @@
         </p:blipFill>
         <p:spPr>
           <a:xfrm>
-            <a:off x="987552" y="2542032"/>
-            <a:ext cx="237744" cy="237744"/>
+            <a:off x="1110447" y="2655783"/>
+            <a:ext cx="266273" cy="266273"/>
           </a:xfrm>
           <a:prstGeom prst="rect">
             <a:avLst/>
@@ -8720,14 +8767,14 @@
       </p:pic>
       <p:sp>
         <p:nvSpPr>
-          <p:cNvPr id="8" name="TextBox 7"/>
+          <p:cNvPr id="9" name="TextBox 8"/>
           <p:cNvSpPr txBox="1"/>
           <p:nvPr/>
         </p:nvSpPr>
         <p:spPr>
           <a:xfrm>
-            <a:off x="1353312" y="2395728"/>
-            <a:ext cx="5029200" cy="530352"/>
+            <a:off x="1627632" y="2395728"/>
+            <a:ext cx="4206240" cy="786384"/>
           </a:xfrm>
           <a:prstGeom prst="rect">
             <a:avLst/>
@@ -8752,7 +8799,7 @@
               </a:spcAft>
             </a:pPr>
             <a:r>
-              <a:rPr sz="1200" b="0">
+              <a:rPr sz="1150" b="0">
                 <a:solidFill>
                   <a:srgbClr val="1A1A1A"/>
                 </a:solidFill>
@@ -8765,18 +8812,18 @@
       </p:sp>
       <p:sp>
         <p:nvSpPr>
-          <p:cNvPr id="9" name="Rounded Rectangle 8"/>
+          <p:cNvPr id="10" name="Rounded Rectangle 9"/>
           <p:cNvSpPr/>
           <p:nvPr/>
         </p:nvSpPr>
         <p:spPr>
           <a:xfrm>
-            <a:off x="841248" y="2999232"/>
-            <a:ext cx="5715000" cy="530352"/>
+            <a:off x="6254496" y="2395728"/>
+            <a:ext cx="5138928" cy="786384"/>
           </a:xfrm>
           <a:prstGeom prst="roundRect">
             <a:avLst>
-              <a:gd name="adj" fmla="val 6000"/>
+              <a:gd name="adj" fmla="val 7000"/>
             </a:avLst>
           </a:prstGeom>
           <a:solidFill>
@@ -8811,9 +8858,55 @@
           </a:p>
         </p:txBody>
       </p:sp>
+      <p:sp>
+        <p:nvSpPr>
+          <p:cNvPr id="11" name="Rounded Rectangle 10"/>
+          <p:cNvSpPr/>
+          <p:nvPr/>
+        </p:nvSpPr>
+        <p:spPr>
+          <a:xfrm>
+            <a:off x="6400800" y="2532888"/>
+            <a:ext cx="512064" cy="512064"/>
+          </a:xfrm>
+          <a:prstGeom prst="roundRect">
+            <a:avLst>
+              <a:gd name="adj" fmla="val 26000"/>
+            </a:avLst>
+          </a:prstGeom>
+          <a:solidFill>
+            <a:srgbClr val="EE0000"/>
+          </a:solidFill>
+          <a:ln>
+            <a:noFill/>
+          </a:ln>
+          <a:effectLst/>
+        </p:spPr>
+        <p:style>
+          <a:lnRef idx="1">
+            <a:schemeClr val="accent1"/>
+          </a:lnRef>
+          <a:fillRef idx="3">
+            <a:schemeClr val="accent1"/>
+          </a:fillRef>
+          <a:effectRef idx="2">
+            <a:schemeClr val="accent1"/>
+          </a:effectRef>
+          <a:fontRef idx="minor">
+            <a:schemeClr val="lt1"/>
+          </a:fontRef>
+        </p:style>
+        <p:txBody>
+          <a:bodyPr rtlCol="0" anchor="ctr"/>
+          <a:lstStyle/>
+          <a:p>
+            <a:pPr algn="ctr"/>
+          </a:p>
+        </p:txBody>
+      </p:sp>
       <p:pic>
         <p:nvPicPr>
-          <p:cNvPr id="10" name="Picture 9" descr="check_steel.png"/>
+          <p:cNvPr id="12" name="Picture 11" descr="check_white.png"/>
           <p:cNvPicPr>
             <a:picLocks noChangeAspect="1"/>
           </p:cNvPicPr>
@@ -8827,8 +8920,8 @@
         </p:blipFill>
         <p:spPr>
           <a:xfrm>
-            <a:off x="987552" y="3145536"/>
-            <a:ext cx="237744" cy="237744"/>
+            <a:off x="6523695" y="2655783"/>
+            <a:ext cx="266273" cy="266273"/>
           </a:xfrm>
           <a:prstGeom prst="rect">
             <a:avLst/>
@@ -8837,14 +8930,14 @@
       </p:pic>
       <p:sp>
         <p:nvSpPr>
-          <p:cNvPr id="11" name="TextBox 10"/>
+          <p:cNvPr id="13" name="TextBox 12"/>
           <p:cNvSpPr txBox="1"/>
           <p:nvPr/>
         </p:nvSpPr>
         <p:spPr>
           <a:xfrm>
-            <a:off x="1353312" y="2999232"/>
-            <a:ext cx="5029200" cy="530352"/>
+            <a:off x="7040880" y="2395728"/>
+            <a:ext cx="4206240" cy="786384"/>
           </a:xfrm>
           <a:prstGeom prst="rect">
             <a:avLst/>
@@ -8869,7 +8962,7 @@
               </a:spcAft>
             </a:pPr>
             <a:r>
-              <a:rPr sz="1200" b="0">
+              <a:rPr sz="1150" b="0">
                 <a:solidFill>
                   <a:srgbClr val="1A1A1A"/>
                 </a:solidFill>
@@ -8882,18 +8975,18 @@
       </p:sp>
       <p:sp>
         <p:nvSpPr>
-          <p:cNvPr id="12" name="Rounded Rectangle 11"/>
+          <p:cNvPr id="14" name="Rounded Rectangle 13"/>
           <p:cNvSpPr/>
           <p:nvPr/>
         </p:nvSpPr>
         <p:spPr>
           <a:xfrm>
-            <a:off x="841248" y="3602736"/>
-            <a:ext cx="5715000" cy="530352"/>
+            <a:off x="841248" y="3328416"/>
+            <a:ext cx="5138928" cy="786384"/>
           </a:xfrm>
           <a:prstGeom prst="roundRect">
             <a:avLst>
-              <a:gd name="adj" fmla="val 6000"/>
+              <a:gd name="adj" fmla="val 7000"/>
             </a:avLst>
           </a:prstGeom>
           <a:solidFill>
@@ -8928,9 +9021,55 @@
           </a:p>
         </p:txBody>
       </p:sp>
+      <p:sp>
+        <p:nvSpPr>
+          <p:cNvPr id="15" name="Rounded Rectangle 14"/>
+          <p:cNvSpPr/>
+          <p:nvPr/>
+        </p:nvSpPr>
+        <p:spPr>
+          <a:xfrm>
+            <a:off x="987552" y="3465576"/>
+            <a:ext cx="512064" cy="512064"/>
+          </a:xfrm>
+          <a:prstGeom prst="roundRect">
+            <a:avLst>
+              <a:gd name="adj" fmla="val 26000"/>
+            </a:avLst>
+          </a:prstGeom>
+          <a:solidFill>
+            <a:srgbClr val="EE0000"/>
+          </a:solidFill>
+          <a:ln>
+            <a:noFill/>
+          </a:ln>
+          <a:effectLst/>
+        </p:spPr>
+        <p:style>
+          <a:lnRef idx="1">
+            <a:schemeClr val="accent1"/>
+          </a:lnRef>
+          <a:fillRef idx="3">
+            <a:schemeClr val="accent1"/>
+          </a:fillRef>
+          <a:effectRef idx="2">
+            <a:schemeClr val="accent1"/>
+          </a:effectRef>
+          <a:fontRef idx="minor">
+            <a:schemeClr val="lt1"/>
+          </a:fontRef>
+        </p:style>
+        <p:txBody>
+          <a:bodyPr rtlCol="0" anchor="ctr"/>
+          <a:lstStyle/>
+          <a:p>
+            <a:pPr algn="ctr"/>
+          </a:p>
+        </p:txBody>
+      </p:sp>
       <p:pic>
         <p:nvPicPr>
-          <p:cNvPr id="13" name="Picture 12" descr="check_steel.png"/>
+          <p:cNvPr id="16" name="Picture 15" descr="check_white.png"/>
           <p:cNvPicPr>
             <a:picLocks noChangeAspect="1"/>
           </p:cNvPicPr>
@@ -8944,8 +9083,8 @@
         </p:blipFill>
         <p:spPr>
           <a:xfrm>
-            <a:off x="987552" y="3749040"/>
-            <a:ext cx="237744" cy="237744"/>
+            <a:off x="1110447" y="3588471"/>
+            <a:ext cx="266273" cy="266273"/>
           </a:xfrm>
           <a:prstGeom prst="rect">
             <a:avLst/>
@@ -8954,14 +9093,14 @@
       </p:pic>
       <p:sp>
         <p:nvSpPr>
-          <p:cNvPr id="14" name="TextBox 13"/>
+          <p:cNvPr id="17" name="TextBox 16"/>
           <p:cNvSpPr txBox="1"/>
           <p:nvPr/>
         </p:nvSpPr>
         <p:spPr>
           <a:xfrm>
-            <a:off x="1353312" y="3602736"/>
-            <a:ext cx="5029200" cy="530352"/>
+            <a:off x="1627632" y="3328416"/>
+            <a:ext cx="4206240" cy="786384"/>
           </a:xfrm>
           <a:prstGeom prst="rect">
             <a:avLst/>
@@ -8986,7 +9125,7 @@
               </a:spcAft>
             </a:pPr>
             <a:r>
-              <a:rPr sz="1200" b="0">
+              <a:rPr sz="1150" b="0">
                 <a:solidFill>
                   <a:srgbClr val="1A1A1A"/>
                 </a:solidFill>
@@ -8999,18 +9138,18 @@
       </p:sp>
       <p:sp>
         <p:nvSpPr>
-          <p:cNvPr id="15" name="Rounded Rectangle 14"/>
+          <p:cNvPr id="18" name="Rounded Rectangle 17"/>
           <p:cNvSpPr/>
           <p:nvPr/>
         </p:nvSpPr>
         <p:spPr>
           <a:xfrm>
-            <a:off x="841248" y="4206240"/>
-            <a:ext cx="5715000" cy="530352"/>
+            <a:off x="6254496" y="3328416"/>
+            <a:ext cx="5138928" cy="786384"/>
           </a:xfrm>
           <a:prstGeom prst="roundRect">
             <a:avLst>
-              <a:gd name="adj" fmla="val 6000"/>
+              <a:gd name="adj" fmla="val 7000"/>
             </a:avLst>
           </a:prstGeom>
           <a:solidFill>
@@ -9045,9 +9184,55 @@
           </a:p>
         </p:txBody>
       </p:sp>
+      <p:sp>
+        <p:nvSpPr>
+          <p:cNvPr id="19" name="Rounded Rectangle 18"/>
+          <p:cNvSpPr/>
+          <p:nvPr/>
+        </p:nvSpPr>
+        <p:spPr>
+          <a:xfrm>
+            <a:off x="6400800" y="3465576"/>
+            <a:ext cx="512064" cy="512064"/>
+          </a:xfrm>
+          <a:prstGeom prst="roundRect">
+            <a:avLst>
+              <a:gd name="adj" fmla="val 26000"/>
+            </a:avLst>
+          </a:prstGeom>
+          <a:solidFill>
+            <a:srgbClr val="EE0000"/>
+          </a:solidFill>
+          <a:ln>
+            <a:noFill/>
+          </a:ln>
+          <a:effectLst/>
+        </p:spPr>
+        <p:style>
+          <a:lnRef idx="1">
+            <a:schemeClr val="accent1"/>
+          </a:lnRef>
+          <a:fillRef idx="3">
+            <a:schemeClr val="accent1"/>
+          </a:fillRef>
+          <a:effectRef idx="2">
+            <a:schemeClr val="accent1"/>
+          </a:effectRef>
+          <a:fontRef idx="minor">
+            <a:schemeClr val="lt1"/>
+          </a:fontRef>
+        </p:style>
+        <p:txBody>
+          <a:bodyPr rtlCol="0" anchor="ctr"/>
+          <a:lstStyle/>
+          <a:p>
+            <a:pPr algn="ctr"/>
+          </a:p>
+        </p:txBody>
+      </p:sp>
       <p:pic>
         <p:nvPicPr>
-          <p:cNvPr id="16" name="Picture 15" descr="check_steel.png"/>
+          <p:cNvPr id="20" name="Picture 19" descr="check_white.png"/>
           <p:cNvPicPr>
             <a:picLocks noChangeAspect="1"/>
           </p:cNvPicPr>
@@ -9061,8 +9246,8 @@
         </p:blipFill>
         <p:spPr>
           <a:xfrm>
-            <a:off x="987552" y="4352544"/>
-            <a:ext cx="237744" cy="237744"/>
+            <a:off x="6523695" y="3588471"/>
+            <a:ext cx="266273" cy="266273"/>
           </a:xfrm>
           <a:prstGeom prst="rect">
             <a:avLst/>
@@ -9071,14 +9256,14 @@
       </p:pic>
       <p:sp>
         <p:nvSpPr>
-          <p:cNvPr id="17" name="TextBox 16"/>
+          <p:cNvPr id="21" name="TextBox 20"/>
           <p:cNvSpPr txBox="1"/>
           <p:nvPr/>
         </p:nvSpPr>
         <p:spPr>
           <a:xfrm>
-            <a:off x="1353312" y="4206240"/>
-            <a:ext cx="5029200" cy="530352"/>
+            <a:off x="7040880" y="3328416"/>
+            <a:ext cx="4206240" cy="786384"/>
           </a:xfrm>
           <a:prstGeom prst="rect">
             <a:avLst/>
@@ -9103,7 +9288,7 @@
               </a:spcAft>
             </a:pPr>
             <a:r>
-              <a:rPr sz="1200" b="0">
+              <a:rPr sz="1150" b="0">
                 <a:solidFill>
                   <a:srgbClr val="1A1A1A"/>
                 </a:solidFill>
@@ -9116,18 +9301,18 @@
       </p:sp>
       <p:sp>
         <p:nvSpPr>
-          <p:cNvPr id="18" name="Rounded Rectangle 17"/>
+          <p:cNvPr id="22" name="Rounded Rectangle 21"/>
           <p:cNvSpPr/>
           <p:nvPr/>
         </p:nvSpPr>
         <p:spPr>
           <a:xfrm>
-            <a:off x="841248" y="4809744"/>
-            <a:ext cx="5715000" cy="530352"/>
+            <a:off x="841248" y="4261104"/>
+            <a:ext cx="5138928" cy="786384"/>
           </a:xfrm>
           <a:prstGeom prst="roundRect">
             <a:avLst>
-              <a:gd name="adj" fmla="val 6000"/>
+              <a:gd name="adj" fmla="val 7000"/>
             </a:avLst>
           </a:prstGeom>
           <a:solidFill>
@@ -9162,9 +9347,55 @@
           </a:p>
         </p:txBody>
       </p:sp>
+      <p:sp>
+        <p:nvSpPr>
+          <p:cNvPr id="23" name="Rounded Rectangle 22"/>
+          <p:cNvSpPr/>
+          <p:nvPr/>
+        </p:nvSpPr>
+        <p:spPr>
+          <a:xfrm>
+            <a:off x="987552" y="4398264"/>
+            <a:ext cx="512064" cy="512064"/>
+          </a:xfrm>
+          <a:prstGeom prst="roundRect">
+            <a:avLst>
+              <a:gd name="adj" fmla="val 26000"/>
+            </a:avLst>
+          </a:prstGeom>
+          <a:solidFill>
+            <a:srgbClr val="EE0000"/>
+          </a:solidFill>
+          <a:ln>
+            <a:noFill/>
+          </a:ln>
+          <a:effectLst/>
+        </p:spPr>
+        <p:style>
+          <a:lnRef idx="1">
+            <a:schemeClr val="accent1"/>
+          </a:lnRef>
+          <a:fillRef idx="3">
+            <a:schemeClr val="accent1"/>
+          </a:fillRef>
+          <a:effectRef idx="2">
+            <a:schemeClr val="accent1"/>
+          </a:effectRef>
+          <a:fontRef idx="minor">
+            <a:schemeClr val="lt1"/>
+          </a:fontRef>
+        </p:style>
+        <p:txBody>
+          <a:bodyPr rtlCol="0" anchor="ctr"/>
+          <a:lstStyle/>
+          <a:p>
+            <a:pPr algn="ctr"/>
+          </a:p>
+        </p:txBody>
+      </p:sp>
       <p:pic>
         <p:nvPicPr>
-          <p:cNvPr id="19" name="Picture 18" descr="check_steel.png"/>
+          <p:cNvPr id="24" name="Picture 23" descr="check_white.png"/>
           <p:cNvPicPr>
             <a:picLocks noChangeAspect="1"/>
           </p:cNvPicPr>
@@ -9178,8 +9409,8 @@
         </p:blipFill>
         <p:spPr>
           <a:xfrm>
-            <a:off x="987552" y="4956048"/>
-            <a:ext cx="237744" cy="237744"/>
+            <a:off x="1110447" y="4521159"/>
+            <a:ext cx="266273" cy="266273"/>
           </a:xfrm>
           <a:prstGeom prst="rect">
             <a:avLst/>
@@ -9188,14 +9419,14 @@
       </p:pic>
       <p:sp>
         <p:nvSpPr>
-          <p:cNvPr id="20" name="TextBox 19"/>
+          <p:cNvPr id="25" name="TextBox 24"/>
           <p:cNvSpPr txBox="1"/>
           <p:nvPr/>
         </p:nvSpPr>
         <p:spPr>
           <a:xfrm>
-            <a:off x="1353312" y="4809744"/>
-            <a:ext cx="5029200" cy="530352"/>
+            <a:off x="1627632" y="4261104"/>
+            <a:ext cx="4206240" cy="786384"/>
           </a:xfrm>
           <a:prstGeom prst="rect">
             <a:avLst/>
@@ -9220,221 +9451,13 @@
               </a:spcAft>
             </a:pPr>
             <a:r>
-              <a:rPr sz="1200" b="0">
+              <a:rPr sz="1150" b="0">
                 <a:solidFill>
                   <a:srgbClr val="1A1A1A"/>
                 </a:solidFill>
                 <a:latin typeface="Red Hat Text"/>
               </a:rPr>
               <a:t>Someone chose what you see</a:t>
-            </a:r>
-          </a:p>
-        </p:txBody>
-      </p:sp>
-      <p:sp>
-        <p:nvSpPr>
-          <p:cNvPr id="21" name="Rounded Rectangle 20"/>
-          <p:cNvSpPr/>
-          <p:nvPr/>
-        </p:nvSpPr>
-        <p:spPr>
-          <a:xfrm>
-            <a:off x="6812280" y="2395728"/>
-            <a:ext cx="4538167" cy="2944368"/>
-          </a:xfrm>
-          <a:prstGeom prst="roundRect">
-            <a:avLst>
-              <a:gd name="adj" fmla="val 4000"/>
-            </a:avLst>
-          </a:prstGeom>
-          <a:solidFill>
-            <a:srgbClr val="FFFFFF"/>
-          </a:solidFill>
-          <a:ln w="15240">
-            <a:solidFill>
-              <a:srgbClr val="DDE1E6"/>
-            </a:solidFill>
-          </a:ln>
-          <a:effectLst/>
-        </p:spPr>
-        <p:style>
-          <a:lnRef idx="1">
-            <a:schemeClr val="accent1"/>
-          </a:lnRef>
-          <a:fillRef idx="3">
-            <a:schemeClr val="accent1"/>
-          </a:fillRef>
-          <a:effectRef idx="2">
-            <a:schemeClr val="accent1"/>
-          </a:effectRef>
-          <a:fontRef idx="minor">
-            <a:schemeClr val="lt1"/>
-          </a:fontRef>
-        </p:style>
-        <p:txBody>
-          <a:bodyPr rtlCol="0" anchor="ctr"/>
-          <a:lstStyle/>
-          <a:p>
-            <a:pPr algn="ctr"/>
-          </a:p>
-        </p:txBody>
-      </p:sp>
-      <p:sp>
-        <p:nvSpPr>
-          <p:cNvPr id="22" name="Rounded Rectangle 21"/>
-          <p:cNvSpPr/>
-          <p:nvPr/>
-        </p:nvSpPr>
-        <p:spPr>
-          <a:xfrm>
-            <a:off x="7013448" y="2596896"/>
-            <a:ext cx="1298448" cy="310896"/>
-          </a:xfrm>
-          <a:prstGeom prst="roundRect">
-            <a:avLst>
-              <a:gd name="adj" fmla="val 50000"/>
-            </a:avLst>
-          </a:prstGeom>
-          <a:solidFill>
-            <a:srgbClr val="FCECEC"/>
-          </a:solidFill>
-          <a:ln>
-            <a:noFill/>
-          </a:ln>
-          <a:effectLst/>
-        </p:spPr>
-        <p:style>
-          <a:lnRef idx="1">
-            <a:schemeClr val="accent1"/>
-          </a:lnRef>
-          <a:fillRef idx="3">
-            <a:schemeClr val="accent1"/>
-          </a:fillRef>
-          <a:effectRef idx="2">
-            <a:schemeClr val="accent1"/>
-          </a:effectRef>
-          <a:fontRef idx="minor">
-            <a:schemeClr val="lt1"/>
-          </a:fontRef>
-        </p:style>
-        <p:txBody>
-          <a:bodyPr rtlCol="0" anchor="ctr"/>
-          <a:lstStyle/>
-          <a:p>
-            <a:pPr algn="ctr"/>
-          </a:p>
-        </p:txBody>
-      </p:sp>
-      <p:sp>
-        <p:nvSpPr>
-          <p:cNvPr id="23" name="TextBox 22"/>
-          <p:cNvSpPr txBox="1"/>
-          <p:nvPr/>
-        </p:nvSpPr>
-        <p:spPr>
-          <a:xfrm>
-            <a:off x="7013448" y="2596896"/>
-            <a:ext cx="1298448" cy="310896"/>
-          </a:xfrm>
-          <a:prstGeom prst="rect">
-            <a:avLst/>
-          </a:prstGeom>
-          <a:noFill/>
-        </p:spPr>
-        <p:txBody>
-          <a:bodyPr wrap="none" anchor="ctr" lIns="0" rIns="0" tIns="0" bIns="0">
-            <a:spAutoFit/>
-          </a:bodyPr>
-          <a:lstStyle/>
-          <a:p>
-            <a:pPr algn="ctr">
-              <a:lnSpc>
-                <a:spcPct val="106000"/>
-              </a:lnSpc>
-              <a:spcBef>
-                <a:spcPts val="0"/>
-              </a:spcBef>
-              <a:spcAft>
-                <a:spcPts val="0"/>
-              </a:spcAft>
-            </a:pPr>
-            <a:r>
-              <a:rPr sz="850" b="1">
-                <a:solidFill>
-                  <a:srgbClr val="B80000"/>
-                </a:solidFill>
-                <a:latin typeface="Red Hat Display"/>
-              </a:rPr>
-              <a:t>MEDIA PASS</a:t>
-            </a:r>
-          </a:p>
-        </p:txBody>
-      </p:sp>
-      <p:pic>
-        <p:nvPicPr>
-          <p:cNvPr id="24" name="Picture 23" descr="eye_slate.png"/>
-          <p:cNvPicPr>
-            <a:picLocks noChangeAspect="1"/>
-          </p:cNvPicPr>
-          <p:nvPr/>
-        </p:nvPicPr>
-        <p:blipFill>
-          <a:blip r:embed="rId4"/>
-          <a:stretch>
-            <a:fillRect/>
-          </a:stretch>
-        </p:blipFill>
-        <p:spPr>
-          <a:xfrm>
-            <a:off x="8843619" y="3108960"/>
-            <a:ext cx="475488" cy="475488"/>
-          </a:xfrm>
-          <a:prstGeom prst="rect">
-            <a:avLst/>
-          </a:prstGeom>
-        </p:spPr>
-      </p:pic>
-      <p:sp>
-        <p:nvSpPr>
-          <p:cNvPr id="25" name="TextBox 24"/>
-          <p:cNvSpPr txBox="1"/>
-          <p:nvPr/>
-        </p:nvSpPr>
-        <p:spPr>
-          <a:xfrm>
-            <a:off x="7050024" y="3721608"/>
-            <a:ext cx="4062679" cy="1481328"/>
-          </a:xfrm>
-          <a:prstGeom prst="rect">
-            <a:avLst/>
-          </a:prstGeom>
-          <a:noFill/>
-        </p:spPr>
-        <p:txBody>
-          <a:bodyPr wrap="square" anchor="t" lIns="0" rIns="0" tIns="0" bIns="0">
-            <a:spAutoFit/>
-          </a:bodyPr>
-          <a:lstStyle/>
-          <a:p>
-            <a:pPr algn="l">
-              <a:lnSpc>
-                <a:spcPct val="120000"/>
-              </a:lnSpc>
-              <a:spcBef>
-                <a:spcPts val="0"/>
-              </a:spcBef>
-              <a:spcAft>
-                <a:spcPts val="0"/>
-              </a:spcAft>
-            </a:pPr>
-            <a:r>
-              <a:rPr sz="950" b="0">
-                <a:solidFill>
-                  <a:srgbClr val="8A9099"/>
-                </a:solidFill>
-                <a:latin typeface="Red Hat Text"/>
-              </a:rPr>
-              <a:t>A catalog grid with a highlighted "Parasol PostgreSQL (ephemeral)" tile and a greyed-out "deprecated" tile beside it.</a:t>
             </a:r>
           </a:p>
         </p:txBody>
@@ -9742,11 +9765,11 @@
         <p:spPr>
           <a:xfrm>
             <a:off x="841248" y="2395728"/>
-            <a:ext cx="5715000" cy="530352"/>
+            <a:ext cx="5138928" cy="786384"/>
           </a:xfrm>
           <a:prstGeom prst="roundRect">
             <a:avLst>
-              <a:gd name="adj" fmla="val 6000"/>
+              <a:gd name="adj" fmla="val 7000"/>
             </a:avLst>
           </a:prstGeom>
           <a:solidFill>
@@ -9781,9 +9804,55 @@
           </a:p>
         </p:txBody>
       </p:sp>
+      <p:sp>
+        <p:nvSpPr>
+          <p:cNvPr id="7" name="Rounded Rectangle 6"/>
+          <p:cNvSpPr/>
+          <p:nvPr/>
+        </p:nvSpPr>
+        <p:spPr>
+          <a:xfrm>
+            <a:off x="987552" y="2532888"/>
+            <a:ext cx="512064" cy="512064"/>
+          </a:xfrm>
+          <a:prstGeom prst="roundRect">
+            <a:avLst>
+              <a:gd name="adj" fmla="val 26000"/>
+            </a:avLst>
+          </a:prstGeom>
+          <a:solidFill>
+            <a:srgbClr val="EE0000"/>
+          </a:solidFill>
+          <a:ln>
+            <a:noFill/>
+          </a:ln>
+          <a:effectLst/>
+        </p:spPr>
+        <p:style>
+          <a:lnRef idx="1">
+            <a:schemeClr val="accent1"/>
+          </a:lnRef>
+          <a:fillRef idx="3">
+            <a:schemeClr val="accent1"/>
+          </a:fillRef>
+          <a:effectRef idx="2">
+            <a:schemeClr val="accent1"/>
+          </a:effectRef>
+          <a:fontRef idx="minor">
+            <a:schemeClr val="lt1"/>
+          </a:fontRef>
+        </p:style>
+        <p:txBody>
+          <a:bodyPr rtlCol="0" anchor="ctr"/>
+          <a:lstStyle/>
+          <a:p>
+            <a:pPr algn="ctr"/>
+          </a:p>
+        </p:txBody>
+      </p:sp>
       <p:pic>
         <p:nvPicPr>
-          <p:cNvPr id="7" name="Picture 6" descr="check_steel.png"/>
+          <p:cNvPr id="8" name="Picture 7" descr="check_white.png"/>
           <p:cNvPicPr>
             <a:picLocks noChangeAspect="1"/>
           </p:cNvPicPr>
@@ -9797,8 +9866,8 @@
         </p:blipFill>
         <p:spPr>
           <a:xfrm>
-            <a:off x="987552" y="2542032"/>
-            <a:ext cx="237744" cy="237744"/>
+            <a:off x="1110447" y="2655783"/>
+            <a:ext cx="266273" cy="266273"/>
           </a:xfrm>
           <a:prstGeom prst="rect">
             <a:avLst/>
@@ -9807,14 +9876,14 @@
       </p:pic>
       <p:sp>
         <p:nvSpPr>
-          <p:cNvPr id="8" name="TextBox 7"/>
+          <p:cNvPr id="9" name="TextBox 8"/>
           <p:cNvSpPr txBox="1"/>
           <p:nvPr/>
         </p:nvSpPr>
         <p:spPr>
           <a:xfrm>
-            <a:off x="1353312" y="2395728"/>
-            <a:ext cx="5029200" cy="530352"/>
+            <a:off x="1627632" y="2395728"/>
+            <a:ext cx="4206240" cy="786384"/>
           </a:xfrm>
           <a:prstGeom prst="rect">
             <a:avLst/>
@@ -9839,7 +9908,7 @@
               </a:spcAft>
             </a:pPr>
             <a:r>
-              <a:rPr sz="1200" b="0">
+              <a:rPr sz="1150" b="0">
                 <a:solidFill>
                   <a:srgbClr val="1A1A1A"/>
                 </a:solidFill>
@@ -9852,18 +9921,18 @@
       </p:sp>
       <p:sp>
         <p:nvSpPr>
-          <p:cNvPr id="9" name="Rounded Rectangle 8"/>
+          <p:cNvPr id="10" name="Rounded Rectangle 9"/>
           <p:cNvSpPr/>
           <p:nvPr/>
         </p:nvSpPr>
         <p:spPr>
           <a:xfrm>
-            <a:off x="841248" y="2999232"/>
-            <a:ext cx="5715000" cy="530352"/>
+            <a:off x="6254496" y="2395728"/>
+            <a:ext cx="5138928" cy="786384"/>
           </a:xfrm>
           <a:prstGeom prst="roundRect">
             <a:avLst>
-              <a:gd name="adj" fmla="val 6000"/>
+              <a:gd name="adj" fmla="val 7000"/>
             </a:avLst>
           </a:prstGeom>
           <a:solidFill>
@@ -9898,9 +9967,55 @@
           </a:p>
         </p:txBody>
       </p:sp>
+      <p:sp>
+        <p:nvSpPr>
+          <p:cNvPr id="11" name="Rounded Rectangle 10"/>
+          <p:cNvSpPr/>
+          <p:nvPr/>
+        </p:nvSpPr>
+        <p:spPr>
+          <a:xfrm>
+            <a:off x="6400800" y="2532888"/>
+            <a:ext cx="512064" cy="512064"/>
+          </a:xfrm>
+          <a:prstGeom prst="roundRect">
+            <a:avLst>
+              <a:gd name="adj" fmla="val 26000"/>
+            </a:avLst>
+          </a:prstGeom>
+          <a:solidFill>
+            <a:srgbClr val="EE0000"/>
+          </a:solidFill>
+          <a:ln>
+            <a:noFill/>
+          </a:ln>
+          <a:effectLst/>
+        </p:spPr>
+        <p:style>
+          <a:lnRef idx="1">
+            <a:schemeClr val="accent1"/>
+          </a:lnRef>
+          <a:fillRef idx="3">
+            <a:schemeClr val="accent1"/>
+          </a:fillRef>
+          <a:effectRef idx="2">
+            <a:schemeClr val="accent1"/>
+          </a:effectRef>
+          <a:fontRef idx="minor">
+            <a:schemeClr val="lt1"/>
+          </a:fontRef>
+        </p:style>
+        <p:txBody>
+          <a:bodyPr rtlCol="0" anchor="ctr"/>
+          <a:lstStyle/>
+          <a:p>
+            <a:pPr algn="ctr"/>
+          </a:p>
+        </p:txBody>
+      </p:sp>
       <p:pic>
         <p:nvPicPr>
-          <p:cNvPr id="10" name="Picture 9" descr="check_steel.png"/>
+          <p:cNvPr id="12" name="Picture 11" descr="check_white.png"/>
           <p:cNvPicPr>
             <a:picLocks noChangeAspect="1"/>
           </p:cNvPicPr>
@@ -9914,8 +10029,8 @@
         </p:blipFill>
         <p:spPr>
           <a:xfrm>
-            <a:off x="987552" y="3145536"/>
-            <a:ext cx="237744" cy="237744"/>
+            <a:off x="6523695" y="2655783"/>
+            <a:ext cx="266273" cy="266273"/>
           </a:xfrm>
           <a:prstGeom prst="rect">
             <a:avLst/>
@@ -9924,14 +10039,14 @@
       </p:pic>
       <p:sp>
         <p:nvSpPr>
-          <p:cNvPr id="11" name="TextBox 10"/>
+          <p:cNvPr id="13" name="TextBox 12"/>
           <p:cNvSpPr txBox="1"/>
           <p:nvPr/>
         </p:nvSpPr>
         <p:spPr>
           <a:xfrm>
-            <a:off x="1353312" y="2999232"/>
-            <a:ext cx="5029200" cy="530352"/>
+            <a:off x="7040880" y="2395728"/>
+            <a:ext cx="4206240" cy="786384"/>
           </a:xfrm>
           <a:prstGeom prst="rect">
             <a:avLst/>
@@ -9956,7 +10071,7 @@
               </a:spcAft>
             </a:pPr>
             <a:r>
-              <a:rPr sz="1200" b="0">
+              <a:rPr sz="1150" b="0">
                 <a:solidFill>
                   <a:srgbClr val="1A1A1A"/>
                 </a:solidFill>
@@ -9969,18 +10084,18 @@
       </p:sp>
       <p:sp>
         <p:nvSpPr>
-          <p:cNvPr id="12" name="Rounded Rectangle 11"/>
+          <p:cNvPr id="14" name="Rounded Rectangle 13"/>
           <p:cNvSpPr/>
           <p:nvPr/>
         </p:nvSpPr>
         <p:spPr>
           <a:xfrm>
-            <a:off x="841248" y="3602736"/>
-            <a:ext cx="5715000" cy="530352"/>
+            <a:off x="841248" y="3328416"/>
+            <a:ext cx="5138928" cy="786384"/>
           </a:xfrm>
           <a:prstGeom prst="roundRect">
             <a:avLst>
-              <a:gd name="adj" fmla="val 6000"/>
+              <a:gd name="adj" fmla="val 7000"/>
             </a:avLst>
           </a:prstGeom>
           <a:solidFill>
@@ -10015,9 +10130,55 @@
           </a:p>
         </p:txBody>
       </p:sp>
+      <p:sp>
+        <p:nvSpPr>
+          <p:cNvPr id="15" name="Rounded Rectangle 14"/>
+          <p:cNvSpPr/>
+          <p:nvPr/>
+        </p:nvSpPr>
+        <p:spPr>
+          <a:xfrm>
+            <a:off x="987552" y="3465576"/>
+            <a:ext cx="512064" cy="512064"/>
+          </a:xfrm>
+          <a:prstGeom prst="roundRect">
+            <a:avLst>
+              <a:gd name="adj" fmla="val 26000"/>
+            </a:avLst>
+          </a:prstGeom>
+          <a:solidFill>
+            <a:srgbClr val="EE0000"/>
+          </a:solidFill>
+          <a:ln>
+            <a:noFill/>
+          </a:ln>
+          <a:effectLst/>
+        </p:spPr>
+        <p:style>
+          <a:lnRef idx="1">
+            <a:schemeClr val="accent1"/>
+          </a:lnRef>
+          <a:fillRef idx="3">
+            <a:schemeClr val="accent1"/>
+          </a:fillRef>
+          <a:effectRef idx="2">
+            <a:schemeClr val="accent1"/>
+          </a:effectRef>
+          <a:fontRef idx="minor">
+            <a:schemeClr val="lt1"/>
+          </a:fontRef>
+        </p:style>
+        <p:txBody>
+          <a:bodyPr rtlCol="0" anchor="ctr"/>
+          <a:lstStyle/>
+          <a:p>
+            <a:pPr algn="ctr"/>
+          </a:p>
+        </p:txBody>
+      </p:sp>
       <p:pic>
         <p:nvPicPr>
-          <p:cNvPr id="13" name="Picture 12" descr="check_steel.png"/>
+          <p:cNvPr id="16" name="Picture 15" descr="check_white.png"/>
           <p:cNvPicPr>
             <a:picLocks noChangeAspect="1"/>
           </p:cNvPicPr>
@@ -10031,8 +10192,8 @@
         </p:blipFill>
         <p:spPr>
           <a:xfrm>
-            <a:off x="987552" y="3749040"/>
-            <a:ext cx="237744" cy="237744"/>
+            <a:off x="1110447" y="3588471"/>
+            <a:ext cx="266273" cy="266273"/>
           </a:xfrm>
           <a:prstGeom prst="rect">
             <a:avLst/>
@@ -10041,14 +10202,14 @@
       </p:pic>
       <p:sp>
         <p:nvSpPr>
-          <p:cNvPr id="14" name="TextBox 13"/>
+          <p:cNvPr id="17" name="TextBox 16"/>
           <p:cNvSpPr txBox="1"/>
           <p:nvPr/>
         </p:nvSpPr>
         <p:spPr>
           <a:xfrm>
-            <a:off x="1353312" y="3602736"/>
-            <a:ext cx="5029200" cy="530352"/>
+            <a:off x="1627632" y="3328416"/>
+            <a:ext cx="4206240" cy="786384"/>
           </a:xfrm>
           <a:prstGeom prst="rect">
             <a:avLst/>
@@ -10073,7 +10234,7 @@
               </a:spcAft>
             </a:pPr>
             <a:r>
-              <a:rPr sz="1200" b="0">
+              <a:rPr sz="1150" b="0">
                 <a:solidFill>
                   <a:srgbClr val="1A1A1A"/>
                 </a:solidFill>
@@ -10086,18 +10247,18 @@
       </p:sp>
       <p:sp>
         <p:nvSpPr>
-          <p:cNvPr id="15" name="Rounded Rectangle 14"/>
+          <p:cNvPr id="18" name="Rounded Rectangle 17"/>
           <p:cNvSpPr/>
           <p:nvPr/>
         </p:nvSpPr>
         <p:spPr>
           <a:xfrm>
-            <a:off x="841248" y="4206240"/>
-            <a:ext cx="5715000" cy="530352"/>
+            <a:off x="6254496" y="3328416"/>
+            <a:ext cx="5138928" cy="786384"/>
           </a:xfrm>
           <a:prstGeom prst="roundRect">
             <a:avLst>
-              <a:gd name="adj" fmla="val 6000"/>
+              <a:gd name="adj" fmla="val 7000"/>
             </a:avLst>
           </a:prstGeom>
           <a:solidFill>
@@ -10132,9 +10293,55 @@
           </a:p>
         </p:txBody>
       </p:sp>
+      <p:sp>
+        <p:nvSpPr>
+          <p:cNvPr id="19" name="Rounded Rectangle 18"/>
+          <p:cNvSpPr/>
+          <p:nvPr/>
+        </p:nvSpPr>
+        <p:spPr>
+          <a:xfrm>
+            <a:off x="6400800" y="3465576"/>
+            <a:ext cx="512064" cy="512064"/>
+          </a:xfrm>
+          <a:prstGeom prst="roundRect">
+            <a:avLst>
+              <a:gd name="adj" fmla="val 26000"/>
+            </a:avLst>
+          </a:prstGeom>
+          <a:solidFill>
+            <a:srgbClr val="EE0000"/>
+          </a:solidFill>
+          <a:ln>
+            <a:noFill/>
+          </a:ln>
+          <a:effectLst/>
+        </p:spPr>
+        <p:style>
+          <a:lnRef idx="1">
+            <a:schemeClr val="accent1"/>
+          </a:lnRef>
+          <a:fillRef idx="3">
+            <a:schemeClr val="accent1"/>
+          </a:fillRef>
+          <a:effectRef idx="2">
+            <a:schemeClr val="accent1"/>
+          </a:effectRef>
+          <a:fontRef idx="minor">
+            <a:schemeClr val="lt1"/>
+          </a:fontRef>
+        </p:style>
+        <p:txBody>
+          <a:bodyPr rtlCol="0" anchor="ctr"/>
+          <a:lstStyle/>
+          <a:p>
+            <a:pPr algn="ctr"/>
+          </a:p>
+        </p:txBody>
+      </p:sp>
       <p:pic>
         <p:nvPicPr>
-          <p:cNvPr id="16" name="Picture 15" descr="check_steel.png"/>
+          <p:cNvPr id="20" name="Picture 19" descr="check_white.png"/>
           <p:cNvPicPr>
             <a:picLocks noChangeAspect="1"/>
           </p:cNvPicPr>
@@ -10148,8 +10355,8 @@
         </p:blipFill>
         <p:spPr>
           <a:xfrm>
-            <a:off x="987552" y="4352544"/>
-            <a:ext cx="237744" cy="237744"/>
+            <a:off x="6523695" y="3588471"/>
+            <a:ext cx="266273" cy="266273"/>
           </a:xfrm>
           <a:prstGeom prst="rect">
             <a:avLst/>
@@ -10158,14 +10365,14 @@
       </p:pic>
       <p:sp>
         <p:nvSpPr>
-          <p:cNvPr id="17" name="TextBox 16"/>
+          <p:cNvPr id="21" name="TextBox 20"/>
           <p:cNvSpPr txBox="1"/>
           <p:nvPr/>
         </p:nvSpPr>
         <p:spPr>
           <a:xfrm>
-            <a:off x="1353312" y="4206240"/>
-            <a:ext cx="5029200" cy="530352"/>
+            <a:off x="7040880" y="3328416"/>
+            <a:ext cx="4206240" cy="786384"/>
           </a:xfrm>
           <a:prstGeom prst="rect">
             <a:avLst/>
@@ -10190,7 +10397,7 @@
               </a:spcAft>
             </a:pPr>
             <a:r>
-              <a:rPr sz="1200" b="0">
+              <a:rPr sz="1150" b="0">
                 <a:solidFill>
                   <a:srgbClr val="1A1A1A"/>
                 </a:solidFill>
@@ -10203,18 +10410,18 @@
       </p:sp>
       <p:sp>
         <p:nvSpPr>
-          <p:cNvPr id="18" name="Rounded Rectangle 17"/>
+          <p:cNvPr id="22" name="Rounded Rectangle 21"/>
           <p:cNvSpPr/>
           <p:nvPr/>
         </p:nvSpPr>
         <p:spPr>
           <a:xfrm>
-            <a:off x="841248" y="4809744"/>
-            <a:ext cx="5715000" cy="530352"/>
+            <a:off x="841248" y="4261104"/>
+            <a:ext cx="5138928" cy="786384"/>
           </a:xfrm>
           <a:prstGeom prst="roundRect">
             <a:avLst>
-              <a:gd name="adj" fmla="val 6000"/>
+              <a:gd name="adj" fmla="val 7000"/>
             </a:avLst>
           </a:prstGeom>
           <a:solidFill>
@@ -10249,9 +10456,55 @@
           </a:p>
         </p:txBody>
       </p:sp>
+      <p:sp>
+        <p:nvSpPr>
+          <p:cNvPr id="23" name="Rounded Rectangle 22"/>
+          <p:cNvSpPr/>
+          <p:nvPr/>
+        </p:nvSpPr>
+        <p:spPr>
+          <a:xfrm>
+            <a:off x="987552" y="4398264"/>
+            <a:ext cx="512064" cy="512064"/>
+          </a:xfrm>
+          <a:prstGeom prst="roundRect">
+            <a:avLst>
+              <a:gd name="adj" fmla="val 26000"/>
+            </a:avLst>
+          </a:prstGeom>
+          <a:solidFill>
+            <a:srgbClr val="EE0000"/>
+          </a:solidFill>
+          <a:ln>
+            <a:noFill/>
+          </a:ln>
+          <a:effectLst/>
+        </p:spPr>
+        <p:style>
+          <a:lnRef idx="1">
+            <a:schemeClr val="accent1"/>
+          </a:lnRef>
+          <a:fillRef idx="3">
+            <a:schemeClr val="accent1"/>
+          </a:fillRef>
+          <a:effectRef idx="2">
+            <a:schemeClr val="accent1"/>
+          </a:effectRef>
+          <a:fontRef idx="minor">
+            <a:schemeClr val="lt1"/>
+          </a:fontRef>
+        </p:style>
+        <p:txBody>
+          <a:bodyPr rtlCol="0" anchor="ctr"/>
+          <a:lstStyle/>
+          <a:p>
+            <a:pPr algn="ctr"/>
+          </a:p>
+        </p:txBody>
+      </p:sp>
       <p:pic>
         <p:nvPicPr>
-          <p:cNvPr id="19" name="Picture 18" descr="check_steel.png"/>
+          <p:cNvPr id="24" name="Picture 23" descr="check_white.png"/>
           <p:cNvPicPr>
             <a:picLocks noChangeAspect="1"/>
           </p:cNvPicPr>
@@ -10265,8 +10518,8 @@
         </p:blipFill>
         <p:spPr>
           <a:xfrm>
-            <a:off x="987552" y="4956048"/>
-            <a:ext cx="237744" cy="237744"/>
+            <a:off x="1110447" y="4521159"/>
+            <a:ext cx="266273" cy="266273"/>
           </a:xfrm>
           <a:prstGeom prst="rect">
             <a:avLst/>
@@ -10275,14 +10528,14 @@
       </p:pic>
       <p:sp>
         <p:nvSpPr>
-          <p:cNvPr id="20" name="TextBox 19"/>
+          <p:cNvPr id="25" name="TextBox 24"/>
           <p:cNvSpPr txBox="1"/>
           <p:nvPr/>
         </p:nvSpPr>
         <p:spPr>
           <a:xfrm>
-            <a:off x="1353312" y="4809744"/>
-            <a:ext cx="5029200" cy="530352"/>
+            <a:off x="1627632" y="4261104"/>
+            <a:ext cx="4206240" cy="786384"/>
           </a:xfrm>
           <a:prstGeom prst="rect">
             <a:avLst/>
@@ -10307,221 +10560,13 @@
               </a:spcAft>
             </a:pPr>
             <a:r>
-              <a:rPr sz="1200" b="0">
+              <a:rPr sz="1150" b="0">
                 <a:solidFill>
                   <a:srgbClr val="1A1A1A"/>
                 </a:solidFill>
                 <a:latin typeface="Red Hat Text"/>
               </a:rPr>
               <a:t>Wire it up; watch the app go live</a:t>
-            </a:r>
-          </a:p>
-        </p:txBody>
-      </p:sp>
-      <p:sp>
-        <p:nvSpPr>
-          <p:cNvPr id="21" name="Rounded Rectangle 20"/>
-          <p:cNvSpPr/>
-          <p:nvPr/>
-        </p:nvSpPr>
-        <p:spPr>
-          <a:xfrm>
-            <a:off x="6812280" y="2395728"/>
-            <a:ext cx="4538167" cy="2944368"/>
-          </a:xfrm>
-          <a:prstGeom prst="roundRect">
-            <a:avLst>
-              <a:gd name="adj" fmla="val 4000"/>
-            </a:avLst>
-          </a:prstGeom>
-          <a:solidFill>
-            <a:srgbClr val="FFFFFF"/>
-          </a:solidFill>
-          <a:ln w="15240">
-            <a:solidFill>
-              <a:srgbClr val="DDE1E6"/>
-            </a:solidFill>
-          </a:ln>
-          <a:effectLst/>
-        </p:spPr>
-        <p:style>
-          <a:lnRef idx="1">
-            <a:schemeClr val="accent1"/>
-          </a:lnRef>
-          <a:fillRef idx="3">
-            <a:schemeClr val="accent1"/>
-          </a:fillRef>
-          <a:effectRef idx="2">
-            <a:schemeClr val="accent1"/>
-          </a:effectRef>
-          <a:fontRef idx="minor">
-            <a:schemeClr val="lt1"/>
-          </a:fontRef>
-        </p:style>
-        <p:txBody>
-          <a:bodyPr rtlCol="0" anchor="ctr"/>
-          <a:lstStyle/>
-          <a:p>
-            <a:pPr algn="ctr"/>
-          </a:p>
-        </p:txBody>
-      </p:sp>
-      <p:sp>
-        <p:nvSpPr>
-          <p:cNvPr id="22" name="Rounded Rectangle 21"/>
-          <p:cNvSpPr/>
-          <p:nvPr/>
-        </p:nvSpPr>
-        <p:spPr>
-          <a:xfrm>
-            <a:off x="7013448" y="2596896"/>
-            <a:ext cx="1298448" cy="310896"/>
-          </a:xfrm>
-          <a:prstGeom prst="roundRect">
-            <a:avLst>
-              <a:gd name="adj" fmla="val 50000"/>
-            </a:avLst>
-          </a:prstGeom>
-          <a:solidFill>
-            <a:srgbClr val="FCECEC"/>
-          </a:solidFill>
-          <a:ln>
-            <a:noFill/>
-          </a:ln>
-          <a:effectLst/>
-        </p:spPr>
-        <p:style>
-          <a:lnRef idx="1">
-            <a:schemeClr val="accent1"/>
-          </a:lnRef>
-          <a:fillRef idx="3">
-            <a:schemeClr val="accent1"/>
-          </a:fillRef>
-          <a:effectRef idx="2">
-            <a:schemeClr val="accent1"/>
-          </a:effectRef>
-          <a:fontRef idx="minor">
-            <a:schemeClr val="lt1"/>
-          </a:fontRef>
-        </p:style>
-        <p:txBody>
-          <a:bodyPr rtlCol="0" anchor="ctr"/>
-          <a:lstStyle/>
-          <a:p>
-            <a:pPr algn="ctr"/>
-          </a:p>
-        </p:txBody>
-      </p:sp>
-      <p:sp>
-        <p:nvSpPr>
-          <p:cNvPr id="23" name="TextBox 22"/>
-          <p:cNvSpPr txBox="1"/>
-          <p:nvPr/>
-        </p:nvSpPr>
-        <p:spPr>
-          <a:xfrm>
-            <a:off x="7013448" y="2596896"/>
-            <a:ext cx="1298448" cy="310896"/>
-          </a:xfrm>
-          <a:prstGeom prst="rect">
-            <a:avLst/>
-          </a:prstGeom>
-          <a:noFill/>
-        </p:spPr>
-        <p:txBody>
-          <a:bodyPr wrap="none" anchor="ctr" lIns="0" rIns="0" tIns="0" bIns="0">
-            <a:spAutoFit/>
-          </a:bodyPr>
-          <a:lstStyle/>
-          <a:p>
-            <a:pPr algn="ctr">
-              <a:lnSpc>
-                <a:spcPct val="106000"/>
-              </a:lnSpc>
-              <a:spcBef>
-                <a:spcPts val="0"/>
-              </a:spcBef>
-              <a:spcAft>
-                <a:spcPts val="0"/>
-              </a:spcAft>
-            </a:pPr>
-            <a:r>
-              <a:rPr sz="850" b="1">
-                <a:solidFill>
-                  <a:srgbClr val="B80000"/>
-                </a:solidFill>
-                <a:latin typeface="Red Hat Display"/>
-              </a:rPr>
-              <a:t>MEDIA PASS</a:t>
-            </a:r>
-          </a:p>
-        </p:txBody>
-      </p:sp>
-      <p:pic>
-        <p:nvPicPr>
-          <p:cNvPr id="24" name="Picture 23" descr="eye_slate.png"/>
-          <p:cNvPicPr>
-            <a:picLocks noChangeAspect="1"/>
-          </p:cNvPicPr>
-          <p:nvPr/>
-        </p:nvPicPr>
-        <p:blipFill>
-          <a:blip r:embed="rId4"/>
-          <a:stretch>
-            <a:fillRect/>
-          </a:stretch>
-        </p:blipFill>
-        <p:spPr>
-          <a:xfrm>
-            <a:off x="8843619" y="3108960"/>
-            <a:ext cx="475488" cy="475488"/>
-          </a:xfrm>
-          <a:prstGeom prst="rect">
-            <a:avLst/>
-          </a:prstGeom>
-        </p:spPr>
-      </p:pic>
-      <p:sp>
-        <p:nvSpPr>
-          <p:cNvPr id="25" name="TextBox 24"/>
-          <p:cNvSpPr txBox="1"/>
-          <p:nvPr/>
-        </p:nvSpPr>
-        <p:spPr>
-          <a:xfrm>
-            <a:off x="7050024" y="3721608"/>
-            <a:ext cx="4062679" cy="1481328"/>
-          </a:xfrm>
-          <a:prstGeom prst="rect">
-            <a:avLst/>
-          </a:prstGeom>
-          <a:noFill/>
-        </p:spPr>
-        <p:txBody>
-          <a:bodyPr wrap="square" anchor="t" lIns="0" rIns="0" tIns="0" bIns="0">
-            <a:spAutoFit/>
-          </a:bodyPr>
-          <a:lstStyle/>
-          <a:p>
-            <a:pPr algn="l">
-              <a:lnSpc>
-                <a:spcPct val="120000"/>
-              </a:lnSpc>
-              <a:spcBef>
-                <a:spcPts val="0"/>
-              </a:spcBef>
-              <a:spcAft>
-                <a:spcPts val="0"/>
-              </a:spcAft>
-            </a:pPr>
-            <a:r>
-              <a:rPr sz="950" b="0">
-                <a:solidFill>
-                  <a:srgbClr val="8A9099"/>
-                </a:solidFill>
-                <a:latin typeface="Red Hat Text"/>
-              </a:rPr>
-              <a:t>Numbered arc strip: S2I claims → Dockerfile compare → Node.js notifications → catalog DB → wire and run.</a:t>
             </a:r>
           </a:p>
         </p:txBody>
@@ -10829,11 +10874,11 @@
         <p:spPr>
           <a:xfrm>
             <a:off x="841248" y="2395728"/>
-            <a:ext cx="5715000" cy="530352"/>
+            <a:ext cx="5138928" cy="786384"/>
           </a:xfrm>
           <a:prstGeom prst="roundRect">
             <a:avLst>
-              <a:gd name="adj" fmla="val 6000"/>
+              <a:gd name="adj" fmla="val 7000"/>
             </a:avLst>
           </a:prstGeom>
           <a:solidFill>
@@ -10868,9 +10913,55 @@
           </a:p>
         </p:txBody>
       </p:sp>
+      <p:sp>
+        <p:nvSpPr>
+          <p:cNvPr id="7" name="Rounded Rectangle 6"/>
+          <p:cNvSpPr/>
+          <p:nvPr/>
+        </p:nvSpPr>
+        <p:spPr>
+          <a:xfrm>
+            <a:off x="987552" y="2532888"/>
+            <a:ext cx="512064" cy="512064"/>
+          </a:xfrm>
+          <a:prstGeom prst="roundRect">
+            <a:avLst>
+              <a:gd name="adj" fmla="val 26000"/>
+            </a:avLst>
+          </a:prstGeom>
+          <a:solidFill>
+            <a:srgbClr val="EE0000"/>
+          </a:solidFill>
+          <a:ln>
+            <a:noFill/>
+          </a:ln>
+          <a:effectLst/>
+        </p:spPr>
+        <p:style>
+          <a:lnRef idx="1">
+            <a:schemeClr val="accent1"/>
+          </a:lnRef>
+          <a:fillRef idx="3">
+            <a:schemeClr val="accent1"/>
+          </a:fillRef>
+          <a:effectRef idx="2">
+            <a:schemeClr val="accent1"/>
+          </a:effectRef>
+          <a:fontRef idx="minor">
+            <a:schemeClr val="lt1"/>
+          </a:fontRef>
+        </p:style>
+        <p:txBody>
+          <a:bodyPr rtlCol="0" anchor="ctr"/>
+          <a:lstStyle/>
+          <a:p>
+            <a:pPr algn="ctr"/>
+          </a:p>
+        </p:txBody>
+      </p:sp>
       <p:pic>
         <p:nvPicPr>
-          <p:cNvPr id="7" name="Picture 6" descr="check_steel.png"/>
+          <p:cNvPr id="8" name="Picture 7" descr="check_white.png"/>
           <p:cNvPicPr>
             <a:picLocks noChangeAspect="1"/>
           </p:cNvPicPr>
@@ -10884,8 +10975,8 @@
         </p:blipFill>
         <p:spPr>
           <a:xfrm>
-            <a:off x="987552" y="2542032"/>
-            <a:ext cx="237744" cy="237744"/>
+            <a:off x="1110447" y="2655783"/>
+            <a:ext cx="266273" cy="266273"/>
           </a:xfrm>
           <a:prstGeom prst="rect">
             <a:avLst/>
@@ -10894,14 +10985,14 @@
       </p:pic>
       <p:sp>
         <p:nvSpPr>
-          <p:cNvPr id="8" name="TextBox 7"/>
+          <p:cNvPr id="9" name="TextBox 8"/>
           <p:cNvSpPr txBox="1"/>
           <p:nvPr/>
         </p:nvSpPr>
         <p:spPr>
           <a:xfrm>
-            <a:off x="1353312" y="2395728"/>
-            <a:ext cx="5029200" cy="530352"/>
+            <a:off x="1627632" y="2395728"/>
+            <a:ext cx="4206240" cy="786384"/>
           </a:xfrm>
           <a:prstGeom prst="rect">
             <a:avLst/>
@@ -10926,7 +11017,7 @@
               </a:spcAft>
             </a:pPr>
             <a:r>
-              <a:rPr sz="1200" b="0">
+              <a:rPr sz="1150" b="0">
                 <a:solidFill>
                   <a:srgbClr val="1A1A1A"/>
                 </a:solidFill>
@@ -10939,18 +11030,18 @@
       </p:sp>
       <p:sp>
         <p:nvSpPr>
-          <p:cNvPr id="9" name="Rounded Rectangle 8"/>
+          <p:cNvPr id="10" name="Rounded Rectangle 9"/>
           <p:cNvSpPr/>
           <p:nvPr/>
         </p:nvSpPr>
         <p:spPr>
           <a:xfrm>
-            <a:off x="841248" y="2999232"/>
-            <a:ext cx="5715000" cy="530352"/>
+            <a:off x="6254496" y="2395728"/>
+            <a:ext cx="5138928" cy="786384"/>
           </a:xfrm>
           <a:prstGeom prst="roundRect">
             <a:avLst>
-              <a:gd name="adj" fmla="val 6000"/>
+              <a:gd name="adj" fmla="val 7000"/>
             </a:avLst>
           </a:prstGeom>
           <a:solidFill>
@@ -10985,9 +11076,55 @@
           </a:p>
         </p:txBody>
       </p:sp>
+      <p:sp>
+        <p:nvSpPr>
+          <p:cNvPr id="11" name="Rounded Rectangle 10"/>
+          <p:cNvSpPr/>
+          <p:nvPr/>
+        </p:nvSpPr>
+        <p:spPr>
+          <a:xfrm>
+            <a:off x="6400800" y="2532888"/>
+            <a:ext cx="512064" cy="512064"/>
+          </a:xfrm>
+          <a:prstGeom prst="roundRect">
+            <a:avLst>
+              <a:gd name="adj" fmla="val 26000"/>
+            </a:avLst>
+          </a:prstGeom>
+          <a:solidFill>
+            <a:srgbClr val="EE0000"/>
+          </a:solidFill>
+          <a:ln>
+            <a:noFill/>
+          </a:ln>
+          <a:effectLst/>
+        </p:spPr>
+        <p:style>
+          <a:lnRef idx="1">
+            <a:schemeClr val="accent1"/>
+          </a:lnRef>
+          <a:fillRef idx="3">
+            <a:schemeClr val="accent1"/>
+          </a:fillRef>
+          <a:effectRef idx="2">
+            <a:schemeClr val="accent1"/>
+          </a:effectRef>
+          <a:fontRef idx="minor">
+            <a:schemeClr val="lt1"/>
+          </a:fontRef>
+        </p:style>
+        <p:txBody>
+          <a:bodyPr rtlCol="0" anchor="ctr"/>
+          <a:lstStyle/>
+          <a:p>
+            <a:pPr algn="ctr"/>
+          </a:p>
+        </p:txBody>
+      </p:sp>
       <p:pic>
         <p:nvPicPr>
-          <p:cNvPr id="10" name="Picture 9" descr="check_steel.png"/>
+          <p:cNvPr id="12" name="Picture 11" descr="check_white.png"/>
           <p:cNvPicPr>
             <a:picLocks noChangeAspect="1"/>
           </p:cNvPicPr>
@@ -11001,8 +11138,8 @@
         </p:blipFill>
         <p:spPr>
           <a:xfrm>
-            <a:off x="987552" y="3145536"/>
-            <a:ext cx="237744" cy="237744"/>
+            <a:off x="6523695" y="2655783"/>
+            <a:ext cx="266273" cy="266273"/>
           </a:xfrm>
           <a:prstGeom prst="rect">
             <a:avLst/>
@@ -11011,14 +11148,14 @@
       </p:pic>
       <p:sp>
         <p:nvSpPr>
-          <p:cNvPr id="11" name="TextBox 10"/>
+          <p:cNvPr id="13" name="TextBox 12"/>
           <p:cNvSpPr txBox="1"/>
           <p:nvPr/>
         </p:nvSpPr>
         <p:spPr>
           <a:xfrm>
-            <a:off x="1353312" y="2999232"/>
-            <a:ext cx="5029200" cy="530352"/>
+            <a:off x="7040880" y="2395728"/>
+            <a:ext cx="4206240" cy="786384"/>
           </a:xfrm>
           <a:prstGeom prst="rect">
             <a:avLst/>
@@ -11043,7 +11180,7 @@
               </a:spcAft>
             </a:pPr>
             <a:r>
-              <a:rPr sz="1200" b="0">
+              <a:rPr sz="1150" b="0">
                 <a:solidFill>
                   <a:srgbClr val="1A1A1A"/>
                 </a:solidFill>
@@ -11056,18 +11193,18 @@
       </p:sp>
       <p:sp>
         <p:nvSpPr>
-          <p:cNvPr id="12" name="Rounded Rectangle 11"/>
+          <p:cNvPr id="14" name="Rounded Rectangle 13"/>
           <p:cNvSpPr/>
           <p:nvPr/>
         </p:nvSpPr>
         <p:spPr>
           <a:xfrm>
-            <a:off x="841248" y="3602736"/>
-            <a:ext cx="5715000" cy="530352"/>
+            <a:off x="841248" y="3328416"/>
+            <a:ext cx="5138928" cy="786384"/>
           </a:xfrm>
           <a:prstGeom prst="roundRect">
             <a:avLst>
-              <a:gd name="adj" fmla="val 6000"/>
+              <a:gd name="adj" fmla="val 7000"/>
             </a:avLst>
           </a:prstGeom>
           <a:solidFill>
@@ -11102,9 +11239,55 @@
           </a:p>
         </p:txBody>
       </p:sp>
+      <p:sp>
+        <p:nvSpPr>
+          <p:cNvPr id="15" name="Rounded Rectangle 14"/>
+          <p:cNvSpPr/>
+          <p:nvPr/>
+        </p:nvSpPr>
+        <p:spPr>
+          <a:xfrm>
+            <a:off x="987552" y="3465576"/>
+            <a:ext cx="512064" cy="512064"/>
+          </a:xfrm>
+          <a:prstGeom prst="roundRect">
+            <a:avLst>
+              <a:gd name="adj" fmla="val 26000"/>
+            </a:avLst>
+          </a:prstGeom>
+          <a:solidFill>
+            <a:srgbClr val="EE0000"/>
+          </a:solidFill>
+          <a:ln>
+            <a:noFill/>
+          </a:ln>
+          <a:effectLst/>
+        </p:spPr>
+        <p:style>
+          <a:lnRef idx="1">
+            <a:schemeClr val="accent1"/>
+          </a:lnRef>
+          <a:fillRef idx="3">
+            <a:schemeClr val="accent1"/>
+          </a:fillRef>
+          <a:effectRef idx="2">
+            <a:schemeClr val="accent1"/>
+          </a:effectRef>
+          <a:fontRef idx="minor">
+            <a:schemeClr val="lt1"/>
+          </a:fontRef>
+        </p:style>
+        <p:txBody>
+          <a:bodyPr rtlCol="0" anchor="ctr"/>
+          <a:lstStyle/>
+          <a:p>
+            <a:pPr algn="ctr"/>
+          </a:p>
+        </p:txBody>
+      </p:sp>
       <p:pic>
         <p:nvPicPr>
-          <p:cNvPr id="13" name="Picture 12" descr="check_steel.png"/>
+          <p:cNvPr id="16" name="Picture 15" descr="check_white.png"/>
           <p:cNvPicPr>
             <a:picLocks noChangeAspect="1"/>
           </p:cNvPicPr>
@@ -11118,8 +11301,8 @@
         </p:blipFill>
         <p:spPr>
           <a:xfrm>
-            <a:off x="987552" y="3749040"/>
-            <a:ext cx="237744" cy="237744"/>
+            <a:off x="1110447" y="3588471"/>
+            <a:ext cx="266273" cy="266273"/>
           </a:xfrm>
           <a:prstGeom prst="rect">
             <a:avLst/>
@@ -11128,14 +11311,14 @@
       </p:pic>
       <p:sp>
         <p:nvSpPr>
-          <p:cNvPr id="14" name="TextBox 13"/>
+          <p:cNvPr id="17" name="TextBox 16"/>
           <p:cNvSpPr txBox="1"/>
           <p:nvPr/>
         </p:nvSpPr>
         <p:spPr>
           <a:xfrm>
-            <a:off x="1353312" y="3602736"/>
-            <a:ext cx="5029200" cy="530352"/>
+            <a:off x="1627632" y="3328416"/>
+            <a:ext cx="4206240" cy="786384"/>
           </a:xfrm>
           <a:prstGeom prst="rect">
             <a:avLst/>
@@ -11160,7 +11343,7 @@
               </a:spcAft>
             </a:pPr>
             <a:r>
-              <a:rPr sz="1200" b="0">
+              <a:rPr sz="1150" b="0">
                 <a:solidFill>
                   <a:srgbClr val="1A1A1A"/>
                 </a:solidFill>
@@ -11173,18 +11356,18 @@
       </p:sp>
       <p:sp>
         <p:nvSpPr>
-          <p:cNvPr id="15" name="Rounded Rectangle 14"/>
+          <p:cNvPr id="18" name="Rounded Rectangle 17"/>
           <p:cNvSpPr/>
           <p:nvPr/>
         </p:nvSpPr>
         <p:spPr>
           <a:xfrm>
-            <a:off x="841248" y="4206240"/>
-            <a:ext cx="5715000" cy="530352"/>
+            <a:off x="6254496" y="3328416"/>
+            <a:ext cx="5138928" cy="786384"/>
           </a:xfrm>
           <a:prstGeom prst="roundRect">
             <a:avLst>
-              <a:gd name="adj" fmla="val 6000"/>
+              <a:gd name="adj" fmla="val 7000"/>
             </a:avLst>
           </a:prstGeom>
           <a:solidFill>
@@ -11219,9 +11402,55 @@
           </a:p>
         </p:txBody>
       </p:sp>
+      <p:sp>
+        <p:nvSpPr>
+          <p:cNvPr id="19" name="Rounded Rectangle 18"/>
+          <p:cNvSpPr/>
+          <p:nvPr/>
+        </p:nvSpPr>
+        <p:spPr>
+          <a:xfrm>
+            <a:off x="6400800" y="3465576"/>
+            <a:ext cx="512064" cy="512064"/>
+          </a:xfrm>
+          <a:prstGeom prst="roundRect">
+            <a:avLst>
+              <a:gd name="adj" fmla="val 26000"/>
+            </a:avLst>
+          </a:prstGeom>
+          <a:solidFill>
+            <a:srgbClr val="EE0000"/>
+          </a:solidFill>
+          <a:ln>
+            <a:noFill/>
+          </a:ln>
+          <a:effectLst/>
+        </p:spPr>
+        <p:style>
+          <a:lnRef idx="1">
+            <a:schemeClr val="accent1"/>
+          </a:lnRef>
+          <a:fillRef idx="3">
+            <a:schemeClr val="accent1"/>
+          </a:fillRef>
+          <a:effectRef idx="2">
+            <a:schemeClr val="accent1"/>
+          </a:effectRef>
+          <a:fontRef idx="minor">
+            <a:schemeClr val="lt1"/>
+          </a:fontRef>
+        </p:style>
+        <p:txBody>
+          <a:bodyPr rtlCol="0" anchor="ctr"/>
+          <a:lstStyle/>
+          <a:p>
+            <a:pPr algn="ctr"/>
+          </a:p>
+        </p:txBody>
+      </p:sp>
       <p:pic>
         <p:nvPicPr>
-          <p:cNvPr id="16" name="Picture 15" descr="check_steel.png"/>
+          <p:cNvPr id="20" name="Picture 19" descr="check_white.png"/>
           <p:cNvPicPr>
             <a:picLocks noChangeAspect="1"/>
           </p:cNvPicPr>
@@ -11235,8 +11464,8 @@
         </p:blipFill>
         <p:spPr>
           <a:xfrm>
-            <a:off x="987552" y="4352544"/>
-            <a:ext cx="237744" cy="237744"/>
+            <a:off x="6523695" y="3588471"/>
+            <a:ext cx="266273" cy="266273"/>
           </a:xfrm>
           <a:prstGeom prst="rect">
             <a:avLst/>
@@ -11245,14 +11474,14 @@
       </p:pic>
       <p:sp>
         <p:nvSpPr>
-          <p:cNvPr id="17" name="TextBox 16"/>
+          <p:cNvPr id="21" name="TextBox 20"/>
           <p:cNvSpPr txBox="1"/>
           <p:nvPr/>
         </p:nvSpPr>
         <p:spPr>
           <a:xfrm>
-            <a:off x="1353312" y="4206240"/>
-            <a:ext cx="5029200" cy="530352"/>
+            <a:off x="7040880" y="3328416"/>
+            <a:ext cx="4206240" cy="786384"/>
           </a:xfrm>
           <a:prstGeom prst="rect">
             <a:avLst/>
@@ -11277,7 +11506,7 @@
               </a:spcAft>
             </a:pPr>
             <a:r>
-              <a:rPr sz="1200" b="0">
+              <a:rPr sz="1150" b="0">
                 <a:solidFill>
                   <a:srgbClr val="1A1A1A"/>
                 </a:solidFill>
@@ -11290,18 +11519,18 @@
       </p:sp>
       <p:sp>
         <p:nvSpPr>
-          <p:cNvPr id="18" name="Rounded Rectangle 17"/>
+          <p:cNvPr id="22" name="Rounded Rectangle 21"/>
           <p:cNvSpPr/>
           <p:nvPr/>
         </p:nvSpPr>
         <p:spPr>
           <a:xfrm>
-            <a:off x="841248" y="4809744"/>
-            <a:ext cx="5715000" cy="530352"/>
+            <a:off x="841248" y="4261104"/>
+            <a:ext cx="5138928" cy="786384"/>
           </a:xfrm>
           <a:prstGeom prst="roundRect">
             <a:avLst>
-              <a:gd name="adj" fmla="val 6000"/>
+              <a:gd name="adj" fmla="val 7000"/>
             </a:avLst>
           </a:prstGeom>
           <a:solidFill>
@@ -11336,9 +11565,55 @@
           </a:p>
         </p:txBody>
       </p:sp>
+      <p:sp>
+        <p:nvSpPr>
+          <p:cNvPr id="23" name="Rounded Rectangle 22"/>
+          <p:cNvSpPr/>
+          <p:nvPr/>
+        </p:nvSpPr>
+        <p:spPr>
+          <a:xfrm>
+            <a:off x="987552" y="4398264"/>
+            <a:ext cx="512064" cy="512064"/>
+          </a:xfrm>
+          <a:prstGeom prst="roundRect">
+            <a:avLst>
+              <a:gd name="adj" fmla="val 26000"/>
+            </a:avLst>
+          </a:prstGeom>
+          <a:solidFill>
+            <a:srgbClr val="EE0000"/>
+          </a:solidFill>
+          <a:ln>
+            <a:noFill/>
+          </a:ln>
+          <a:effectLst/>
+        </p:spPr>
+        <p:style>
+          <a:lnRef idx="1">
+            <a:schemeClr val="accent1"/>
+          </a:lnRef>
+          <a:fillRef idx="3">
+            <a:schemeClr val="accent1"/>
+          </a:fillRef>
+          <a:effectRef idx="2">
+            <a:schemeClr val="accent1"/>
+          </a:effectRef>
+          <a:fontRef idx="minor">
+            <a:schemeClr val="lt1"/>
+          </a:fontRef>
+        </p:style>
+        <p:txBody>
+          <a:bodyPr rtlCol="0" anchor="ctr"/>
+          <a:lstStyle/>
+          <a:p>
+            <a:pPr algn="ctr"/>
+          </a:p>
+        </p:txBody>
+      </p:sp>
       <p:pic>
         <p:nvPicPr>
-          <p:cNvPr id="19" name="Picture 18" descr="check_steel.png"/>
+          <p:cNvPr id="24" name="Picture 23" descr="check_white.png"/>
           <p:cNvPicPr>
             <a:picLocks noChangeAspect="1"/>
           </p:cNvPicPr>
@@ -11352,8 +11627,8 @@
         </p:blipFill>
         <p:spPr>
           <a:xfrm>
-            <a:off x="987552" y="4956048"/>
-            <a:ext cx="237744" cy="237744"/>
+            <a:off x="1110447" y="4521159"/>
+            <a:ext cx="266273" cy="266273"/>
           </a:xfrm>
           <a:prstGeom prst="rect">
             <a:avLst/>
@@ -11362,14 +11637,14 @@
       </p:pic>
       <p:sp>
         <p:nvSpPr>
-          <p:cNvPr id="20" name="TextBox 19"/>
+          <p:cNvPr id="25" name="TextBox 24"/>
           <p:cNvSpPr txBox="1"/>
           <p:nvPr/>
         </p:nvSpPr>
         <p:spPr>
           <a:xfrm>
-            <a:off x="1353312" y="4809744"/>
-            <a:ext cx="5029200" cy="530352"/>
+            <a:off x="1627632" y="4261104"/>
+            <a:ext cx="4206240" cy="786384"/>
           </a:xfrm>
           <a:prstGeom prst="rect">
             <a:avLst/>
@@ -11394,7 +11669,7 @@
               </a:spcAft>
             </a:pPr>
             <a:r>
-              <a:rPr sz="1200" b="0">
+              <a:rPr sz="1150" b="0">
                 <a:solidFill>
                   <a:srgbClr val="1A1A1A"/>
                 </a:solidFill>
@@ -11405,16 +11680,310 @@
           </a:p>
         </p:txBody>
       </p:sp>
-      <p:sp>
-        <p:nvSpPr>
-          <p:cNvPr id="21" name="Rounded Rectangle 20"/>
+      <p:cxnSp>
+        <p:nvCxnSpPr>
+          <p:cNvPr id="26" name="Connector 25"/>
+          <p:cNvCxnSpPr/>
+          <p:nvPr/>
+        </p:nvCxnSpPr>
+        <p:spPr>
+          <a:xfrm>
+            <a:off x="841248" y="6437376"/>
+            <a:ext cx="10509199" cy="0"/>
+          </a:xfrm>
+          <a:prstGeom prst="bentConnector3">
+            <a:avLst/>
+          </a:prstGeom>
+          <a:ln w="12700">
+            <a:solidFill>
+              <a:srgbClr val="DDE1E6"/>
+            </a:solidFill>
+          </a:ln>
+          <a:effectLst/>
+        </p:spPr>
+        <p:style>
+          <a:lnRef idx="2">
+            <a:schemeClr val="accent1"/>
+          </a:lnRef>
+          <a:fillRef idx="0">
+            <a:schemeClr val="accent1"/>
+          </a:fillRef>
+          <a:effectRef idx="1">
+            <a:schemeClr val="accent1"/>
+          </a:effectRef>
+          <a:fontRef idx="minor">
+            <a:schemeClr val="tx1"/>
+          </a:fontRef>
+        </p:style>
+      </p:cxnSp>
+      <p:sp>
+        <p:nvSpPr>
+          <p:cNvPr id="27" name="TextBox 26"/>
+          <p:cNvSpPr txBox="1"/>
+          <p:nvPr/>
+        </p:nvSpPr>
+        <p:spPr>
+          <a:xfrm>
+            <a:off x="841248" y="6473952"/>
+            <a:ext cx="7315200" cy="274320"/>
+          </a:xfrm>
+          <a:prstGeom prst="rect">
+            <a:avLst/>
+          </a:prstGeom>
+          <a:noFill/>
+        </p:spPr>
+        <p:txBody>
+          <a:bodyPr wrap="square" anchor="t" lIns="0" rIns="0" tIns="0" bIns="0">
+            <a:spAutoFit/>
+          </a:bodyPr>
+          <a:lstStyle/>
+          <a:p>
+            <a:pPr algn="l">
+              <a:lnSpc>
+                <a:spcPct val="106000"/>
+              </a:lnSpc>
+              <a:spcBef>
+                <a:spcPts val="0"/>
+              </a:spcBef>
+              <a:spcAft>
+                <a:spcPts val="0"/>
+              </a:spcAft>
+            </a:pPr>
+            <a:r>
+              <a:rPr sz="950" b="0">
+                <a:solidFill>
+                  <a:srgbClr val="8A9099"/>
+                </a:solidFill>
+                <a:latin typeface="Red Hat Text"/>
+              </a:rPr>
+              <a:t>CONFIDENTIAL</a:t>
+            </a:r>
+          </a:p>
+        </p:txBody>
+      </p:sp>
+      <p:sp>
+        <p:nvSpPr>
+          <p:cNvPr id="28" name="TextBox 27"/>
+          <p:cNvSpPr txBox="1"/>
+          <p:nvPr/>
+        </p:nvSpPr>
+        <p:spPr>
+          <a:xfrm>
+            <a:off x="10801807" y="6473952"/>
+            <a:ext cx="548640" cy="274320"/>
+          </a:xfrm>
+          <a:prstGeom prst="rect">
+            <a:avLst/>
+          </a:prstGeom>
+          <a:noFill/>
+        </p:spPr>
+        <p:txBody>
+          <a:bodyPr wrap="square" anchor="t" lIns="0" rIns="0" tIns="0" bIns="0">
+            <a:spAutoFit/>
+          </a:bodyPr>
+          <a:lstStyle/>
+          <a:p>
+            <a:pPr algn="r">
+              <a:lnSpc>
+                <a:spcPct val="106000"/>
+              </a:lnSpc>
+              <a:spcBef>
+                <a:spcPts val="0"/>
+              </a:spcBef>
+              <a:spcAft>
+                <a:spcPts val="0"/>
+              </a:spcAft>
+            </a:pPr>
+            <a:r>
+              <a:rPr sz="950" b="0">
+                <a:solidFill>
+                  <a:srgbClr val="8A9099"/>
+                </a:solidFill>
+                <a:latin typeface="Red Hat Text"/>
+              </a:rPr>
+              <a:t>7</a:t>
+            </a:r>
+          </a:p>
+        </p:txBody>
+      </p:sp>
+    </p:spTree>
+  </p:cSld>
+  <p:clrMapOvr>
+    <a:masterClrMapping/>
+  </p:clrMapOvr>
+</p:sld>
+</file>
+
+<file path=ppt/slides/slide9.xml><?xml version="1.0" encoding="utf-8"?>
+<p:sld xmlns:a="http://schemas.openxmlformats.org/drawingml/2006/main" xmlns:p="http://schemas.openxmlformats.org/presentationml/2006/main" xmlns:r="http://schemas.openxmlformats.org/officeDocument/2006/relationships">
+  <p:cSld>
+    <p:spTree>
+      <p:nvGrpSpPr>
+        <p:cNvPr id="1" name=""/>
+        <p:cNvGrpSpPr/>
+        <p:nvPr/>
+      </p:nvGrpSpPr>
+      <p:grpSpPr/>
+      <p:pic>
+        <p:nvPicPr>
+          <p:cNvPr id="2" name="Picture 1" descr="redhat_logo.jpg"/>
+          <p:cNvPicPr>
+            <a:picLocks noChangeAspect="1"/>
+          </p:cNvPicPr>
+          <p:nvPr/>
+        </p:nvPicPr>
+        <p:blipFill>
+          <a:blip r:embed="rId2"/>
+          <a:stretch>
+            <a:fillRect/>
+          </a:stretch>
+        </p:blipFill>
+        <p:spPr>
+          <a:xfrm>
+            <a:off x="10326319" y="475488"/>
+            <a:ext cx="1024128" cy="242248"/>
+          </a:xfrm>
+          <a:prstGeom prst="rect">
+            <a:avLst/>
+          </a:prstGeom>
+        </p:spPr>
+      </p:pic>
+      <p:sp>
+        <p:nvSpPr>
+          <p:cNvPr id="3" name="TextBox 2"/>
+          <p:cNvSpPr txBox="1"/>
+          <p:nvPr/>
+        </p:nvSpPr>
+        <p:spPr>
+          <a:xfrm>
+            <a:off x="841248" y="548640"/>
+            <a:ext cx="8595360" cy="274320"/>
+          </a:xfrm>
+          <a:prstGeom prst="rect">
+            <a:avLst/>
+          </a:prstGeom>
+          <a:noFill/>
+        </p:spPr>
+        <p:txBody>
+          <a:bodyPr wrap="square" anchor="t" lIns="0" rIns="0" tIns="0" bIns="0">
+            <a:spAutoFit/>
+          </a:bodyPr>
+          <a:lstStyle/>
+          <a:p>
+            <a:pPr algn="l">
+              <a:lnSpc>
+                <a:spcPct val="106000"/>
+              </a:lnSpc>
+              <a:spcBef>
+                <a:spcPts val="0"/>
+              </a:spcBef>
+              <a:spcAft>
+                <a:spcPts val="0"/>
+              </a:spcAft>
+            </a:pPr>
+            <a:r>
+              <a:rPr sz="1250" b="1" spc="220">
+                <a:solidFill>
+                  <a:srgbClr val="EE0000"/>
+                </a:solidFill>
+                <a:latin typeface="Red Hat Display"/>
+              </a:rPr>
+              <a:t>M02 · WAYS TO BUILD &amp; DELIVER APPS</a:t>
+            </a:r>
+          </a:p>
+        </p:txBody>
+      </p:sp>
+      <p:sp>
+        <p:nvSpPr>
+          <p:cNvPr id="4" name="TextBox 3"/>
+          <p:cNvSpPr txBox="1"/>
+          <p:nvPr/>
+        </p:nvSpPr>
+        <p:spPr>
+          <a:xfrm>
+            <a:off x="841248" y="877824"/>
+            <a:ext cx="10515600" cy="548640"/>
+          </a:xfrm>
+          <a:prstGeom prst="rect">
+            <a:avLst/>
+          </a:prstGeom>
+          <a:noFill/>
+        </p:spPr>
+        <p:txBody>
+          <a:bodyPr wrap="none" anchor="t" lIns="0" rIns="0" tIns="0" bIns="0">
+            <a:spAutoFit/>
+          </a:bodyPr>
+          <a:lstStyle/>
+          <a:p>
+            <a:pPr algn="l">
+              <a:lnSpc>
+                <a:spcPct val="100000"/>
+              </a:lnSpc>
+              <a:spcBef>
+                <a:spcPts val="0"/>
+              </a:spcBef>
+              <a:spcAft>
+                <a:spcPts val="0"/>
+              </a:spcAft>
+            </a:pPr>
+            <a:r>
+              <a:rPr sz="2500" b="1">
+                <a:solidFill>
+                  <a:srgbClr val="1A1A1A"/>
+                </a:solidFill>
+                <a:latin typeface="Red Hat Display"/>
+              </a:rPr>
+              <a:t>What you built</a:t>
+            </a:r>
+          </a:p>
+        </p:txBody>
+      </p:sp>
+      <p:cxnSp>
+        <p:nvCxnSpPr>
+          <p:cNvPr id="5" name="Connector 4"/>
+          <p:cNvCxnSpPr/>
+          <p:nvPr/>
+        </p:nvCxnSpPr>
+        <p:spPr>
+          <a:xfrm>
+            <a:off x="841248" y="1554480"/>
+            <a:ext cx="1371600" cy="0"/>
+          </a:xfrm>
+          <a:prstGeom prst="bentConnector3">
+            <a:avLst/>
+          </a:prstGeom>
+          <a:ln w="31750">
+            <a:solidFill>
+              <a:srgbClr val="EE0000"/>
+            </a:solidFill>
+          </a:ln>
+          <a:effectLst/>
+        </p:spPr>
+        <p:style>
+          <a:lnRef idx="2">
+            <a:schemeClr val="accent1"/>
+          </a:lnRef>
+          <a:fillRef idx="0">
+            <a:schemeClr val="accent1"/>
+          </a:fillRef>
+          <a:effectRef idx="1">
+            <a:schemeClr val="accent1"/>
+          </a:effectRef>
+          <a:fontRef idx="minor">
+            <a:schemeClr val="tx1"/>
+          </a:fontRef>
+        </p:style>
+      </p:cxnSp>
+      <p:sp>
+        <p:nvSpPr>
+          <p:cNvPr id="6" name="Rounded Rectangle 5"/>
           <p:cNvSpPr/>
           <p:nvPr/>
         </p:nvSpPr>
         <p:spPr>
           <a:xfrm>
-            <a:off x="6812280" y="2395728"/>
-            <a:ext cx="4538167" cy="2944368"/>
+            <a:off x="841248" y="2331720"/>
+            <a:ext cx="10509199" cy="3794760"/>
           </a:xfrm>
           <a:prstGeom prst="roundRect">
             <a:avLst>
@@ -11453,169 +12022,33 @@
           </a:p>
         </p:txBody>
       </p:sp>
-      <p:sp>
-        <p:nvSpPr>
-          <p:cNvPr id="22" name="Rounded Rectangle 21"/>
-          <p:cNvSpPr/>
-          <p:nvPr/>
-        </p:nvSpPr>
-        <p:spPr>
-          <a:xfrm>
-            <a:off x="7013448" y="2596896"/>
-            <a:ext cx="1298448" cy="310896"/>
-          </a:xfrm>
-          <a:prstGeom prst="roundRect">
-            <a:avLst>
-              <a:gd name="adj" fmla="val 50000"/>
-            </a:avLst>
-          </a:prstGeom>
-          <a:solidFill>
-            <a:srgbClr val="FCECEC"/>
-          </a:solidFill>
-          <a:ln>
-            <a:noFill/>
-          </a:ln>
-          <a:effectLst/>
-        </p:spPr>
-        <p:style>
-          <a:lnRef idx="1">
-            <a:schemeClr val="accent1"/>
-          </a:lnRef>
-          <a:fillRef idx="3">
-            <a:schemeClr val="accent1"/>
-          </a:fillRef>
-          <a:effectRef idx="2">
-            <a:schemeClr val="accent1"/>
-          </a:effectRef>
-          <a:fontRef idx="minor">
-            <a:schemeClr val="lt1"/>
-          </a:fontRef>
-        </p:style>
-        <p:txBody>
-          <a:bodyPr rtlCol="0" anchor="ctr"/>
-          <a:lstStyle/>
-          <a:p>
-            <a:pPr algn="ctr"/>
-          </a:p>
-        </p:txBody>
-      </p:sp>
-      <p:sp>
-        <p:nvSpPr>
-          <p:cNvPr id="23" name="TextBox 22"/>
-          <p:cNvSpPr txBox="1"/>
-          <p:nvPr/>
-        </p:nvSpPr>
-        <p:spPr>
-          <a:xfrm>
-            <a:off x="7013448" y="2596896"/>
-            <a:ext cx="1298448" cy="310896"/>
-          </a:xfrm>
-          <a:prstGeom prst="rect">
-            <a:avLst/>
-          </a:prstGeom>
-          <a:noFill/>
-        </p:spPr>
-        <p:txBody>
-          <a:bodyPr wrap="none" anchor="ctr" lIns="0" rIns="0" tIns="0" bIns="0">
-            <a:spAutoFit/>
-          </a:bodyPr>
-          <a:lstStyle/>
-          <a:p>
-            <a:pPr algn="ctr">
-              <a:lnSpc>
-                <a:spcPct val="106000"/>
-              </a:lnSpc>
-              <a:spcBef>
-                <a:spcPts val="0"/>
-              </a:spcBef>
-              <a:spcAft>
-                <a:spcPts val="0"/>
-              </a:spcAft>
-            </a:pPr>
-            <a:r>
-              <a:rPr sz="850" b="1">
-                <a:solidFill>
-                  <a:srgbClr val="B80000"/>
-                </a:solidFill>
-                <a:latin typeface="Red Hat Display"/>
-              </a:rPr>
-              <a:t>MEDIA PASS</a:t>
-            </a:r>
-          </a:p>
-        </p:txBody>
-      </p:sp>
       <p:pic>
         <p:nvPicPr>
-          <p:cNvPr id="24" name="Picture 23" descr="eye_slate.png"/>
+          <p:cNvPr id="7" name="Picture 6" descr="03-what-you-built.png"/>
           <p:cNvPicPr>
             <a:picLocks noChangeAspect="1"/>
           </p:cNvPicPr>
           <p:nvPr/>
         </p:nvPicPr>
         <p:blipFill>
-          <a:blip r:embed="rId4"/>
+          <a:blip r:embed="rId3"/>
           <a:stretch>
             <a:fillRect/>
           </a:stretch>
         </p:blipFill>
         <p:spPr>
           <a:xfrm>
-            <a:off x="8843619" y="3108960"/>
-            <a:ext cx="475488" cy="475488"/>
+            <a:off x="1042416" y="2675169"/>
+            <a:ext cx="10106863" cy="3107860"/>
           </a:xfrm>
           <a:prstGeom prst="rect">
             <a:avLst/>
           </a:prstGeom>
         </p:spPr>
       </p:pic>
-      <p:sp>
-        <p:nvSpPr>
-          <p:cNvPr id="25" name="TextBox 24"/>
-          <p:cNvSpPr txBox="1"/>
-          <p:nvPr/>
-        </p:nvSpPr>
-        <p:spPr>
-          <a:xfrm>
-            <a:off x="7050024" y="3721608"/>
-            <a:ext cx="4062679" cy="1481328"/>
-          </a:xfrm>
-          <a:prstGeom prst="rect">
-            <a:avLst/>
-          </a:prstGeom>
-          <a:noFill/>
-        </p:spPr>
-        <p:txBody>
-          <a:bodyPr wrap="square" anchor="t" lIns="0" rIns="0" tIns="0" bIns="0">
-            <a:spAutoFit/>
-          </a:bodyPr>
-          <a:lstStyle/>
-          <a:p>
-            <a:pPr algn="l">
-              <a:lnSpc>
-                <a:spcPct val="120000"/>
-              </a:lnSpc>
-              <a:spcBef>
-                <a:spcPts val="0"/>
-              </a:spcBef>
-              <a:spcAft>
-                <a:spcPts val="0"/>
-              </a:spcAft>
-            </a:pPr>
-            <a:r>
-              <a:rPr sz="950" b="0">
-                <a:solidFill>
-                  <a:srgbClr val="8A9099"/>
-                </a:solidFill>
-                <a:latin typeface="Red Hat Text"/>
-              </a:rPr>
-              <a:t>Two-column decision card — "S2I by default / Dockerfile on purpose" with the trade-offs.</a:t>
-            </a:r>
-          </a:p>
-        </p:txBody>
-      </p:sp>
       <p:cxnSp>
         <p:nvCxnSpPr>
-          <p:cNvPr id="26" name="Connector 25"/>
+          <p:cNvPr id="8" name="Connector 7"/>
           <p:cNvCxnSpPr/>
           <p:nvPr/>
         </p:nvCxnSpPr>
@@ -11651,7 +12084,7 @@
       </p:cxnSp>
       <p:sp>
         <p:nvSpPr>
-          <p:cNvPr id="27" name="TextBox 26"/>
+          <p:cNvPr id="9" name="TextBox 8"/>
           <p:cNvSpPr txBox="1"/>
           <p:nvPr/>
         </p:nvSpPr>
@@ -11696,7 +12129,7 @@
       </p:sp>
       <p:sp>
         <p:nvSpPr>
-          <p:cNvPr id="28" name="TextBox 27"/>
+          <p:cNvPr id="10" name="TextBox 9"/>
           <p:cNvSpPr txBox="1"/>
           <p:nvPr/>
         </p:nvSpPr>
@@ -11734,7 +12167,7 @@
                 </a:solidFill>
                 <a:latin typeface="Red Hat Text"/>
               </a:rPr>
-              <a:t>7</a:t>
+              <a:t>8</a:t>
             </a:r>
           </a:p>
         </p:txBody>
